--- a/03-课件PPT/讲次版/第2章-1-讲次 2-1 · Function Calling 与 .pptx
+++ b/03-课件PPT/讲次版/第2章-1-讲次 2-1 · Function Calling 与 .pptx
@@ -7396,7 +7396,7 @@
                 </a:solidFill>
                 <a:latin typeface="PingFang SC"/>
               </a:rPr>
-              <a:t>失败可程序处理|三方共享:模型/Runtime/审计</a:t>
+              <a:t>失败可程序处理</a:t>
             </a:r>
           </a:p>
         </p:txBody>
@@ -8999,46 +8999,7 @@
       </p:sp>
       <p:sp>
         <p:nvSpPr>
-          <p:cNvPr id="5" name="TextBox 4"/>
-          <p:cNvSpPr txBox="1"/>
-          <p:nvPr/>
-        </p:nvSpPr>
-        <p:spPr>
-          <a:xfrm>
-            <a:off x="9334500" y="0"/>
-            <a:ext cx="2667000" cy="704850"/>
-          </a:xfrm>
-          <a:prstGeom prst="rect">
-            <a:avLst/>
-          </a:prstGeom>
-          <a:noFill/>
-        </p:spPr>
-        <p:txBody>
-          <a:bodyPr wrap="square" anchor="ctr">
-            <a:spAutoFit/>
-          </a:bodyPr>
-          <a:lstStyle/>
-          <a:p>
-            <a:pPr algn="r">
-              <a:lnSpc>
-                <a:spcPct val="100000"/>
-              </a:lnSpc>
-            </a:pPr>
-            <a:r>
-              <a:rPr sz="1100" b="0">
-                <a:solidFill>
-                  <a:srgbClr val="94A3B8"/>
-                </a:solidFill>
-                <a:latin typeface="PingFang SC"/>
-              </a:rPr>
-              <a:t>选择准确率可评测</a:t>
-            </a:r>
-          </a:p>
-        </p:txBody>
-      </p:sp>
-      <p:sp>
-        <p:nvSpPr>
-          <p:cNvPr id="6" name="Rounded Rectangle 5"/>
+          <p:cNvPr id="5" name="Rounded Rectangle 4"/>
           <p:cNvSpPr/>
           <p:nvPr/>
         </p:nvSpPr>
@@ -9086,7 +9047,7 @@
       </p:sp>
       <p:sp>
         <p:nvSpPr>
-          <p:cNvPr id="7" name="Rectangle 6"/>
+          <p:cNvPr id="6" name="Rectangle 5"/>
           <p:cNvSpPr/>
           <p:nvPr/>
         </p:nvSpPr>
@@ -9130,7 +9091,7 @@
       </p:sp>
       <p:sp>
         <p:nvSpPr>
-          <p:cNvPr id="8" name="Rounded Rectangle 7"/>
+          <p:cNvPr id="7" name="Rounded Rectangle 6"/>
           <p:cNvSpPr/>
           <p:nvPr/>
         </p:nvSpPr>
@@ -9176,7 +9137,7 @@
       </p:sp>
       <p:sp>
         <p:nvSpPr>
-          <p:cNvPr id="9" name="TextBox 8"/>
+          <p:cNvPr id="8" name="TextBox 7"/>
           <p:cNvSpPr txBox="1"/>
           <p:nvPr/>
         </p:nvSpPr>
@@ -9215,7 +9176,7 @@
       </p:sp>
       <p:sp>
         <p:nvSpPr>
-          <p:cNvPr id="10" name="TextBox 9"/>
+          <p:cNvPr id="9" name="TextBox 8"/>
           <p:cNvSpPr txBox="1"/>
           <p:nvPr/>
         </p:nvSpPr>
@@ -9254,7 +9215,7 @@
       </p:sp>
       <p:sp>
         <p:nvSpPr>
-          <p:cNvPr id="11" name="Rounded Rectangle 10"/>
+          <p:cNvPr id="10" name="Rounded Rectangle 9"/>
           <p:cNvSpPr/>
           <p:nvPr/>
         </p:nvSpPr>
@@ -9302,7 +9263,7 @@
       </p:sp>
       <p:sp>
         <p:nvSpPr>
-          <p:cNvPr id="12" name="Rectangle 11"/>
+          <p:cNvPr id="11" name="Rectangle 10"/>
           <p:cNvSpPr/>
           <p:nvPr/>
         </p:nvSpPr>
@@ -9346,7 +9307,7 @@
       </p:sp>
       <p:sp>
         <p:nvSpPr>
-          <p:cNvPr id="13" name="Rounded Rectangle 12"/>
+          <p:cNvPr id="12" name="Rounded Rectangle 11"/>
           <p:cNvSpPr/>
           <p:nvPr/>
         </p:nvSpPr>
@@ -9392,7 +9353,7 @@
       </p:sp>
       <p:sp>
         <p:nvSpPr>
-          <p:cNvPr id="14" name="TextBox 13"/>
+          <p:cNvPr id="13" name="TextBox 12"/>
           <p:cNvSpPr txBox="1"/>
           <p:nvPr/>
         </p:nvSpPr>
@@ -9431,7 +9392,7 @@
       </p:sp>
       <p:sp>
         <p:nvSpPr>
-          <p:cNvPr id="15" name="TextBox 14"/>
+          <p:cNvPr id="14" name="TextBox 13"/>
           <p:cNvSpPr txBox="1"/>
           <p:nvPr/>
         </p:nvSpPr>
@@ -9470,7 +9431,7 @@
       </p:sp>
       <p:cxnSp>
         <p:nvCxnSpPr>
-          <p:cNvPr id="16" name="Connector 15"/>
+          <p:cNvPr id="15" name="Connector 14"/>
           <p:cNvCxnSpPr/>
           <p:nvPr/>
         </p:nvCxnSpPr>
@@ -9505,7 +9466,7 @@
       </p:cxnSp>
       <p:sp>
         <p:nvSpPr>
-          <p:cNvPr id="17" name="Isosceles Triangle 16"/>
+          <p:cNvPr id="16" name="Isosceles Triangle 15"/>
           <p:cNvSpPr/>
           <p:nvPr/>
         </p:nvSpPr>
@@ -9549,7 +9510,7 @@
       </p:sp>
       <p:sp>
         <p:nvSpPr>
-          <p:cNvPr id="18" name="Rounded Rectangle 17"/>
+          <p:cNvPr id="17" name="Rounded Rectangle 16"/>
           <p:cNvSpPr/>
           <p:nvPr/>
         </p:nvSpPr>
@@ -9597,7 +9558,7 @@
       </p:sp>
       <p:sp>
         <p:nvSpPr>
-          <p:cNvPr id="19" name="Rectangle 18"/>
+          <p:cNvPr id="18" name="Rectangle 17"/>
           <p:cNvSpPr/>
           <p:nvPr/>
         </p:nvSpPr>
@@ -9641,7 +9602,7 @@
       </p:sp>
       <p:sp>
         <p:nvSpPr>
-          <p:cNvPr id="20" name="Rounded Rectangle 19"/>
+          <p:cNvPr id="19" name="Rounded Rectangle 18"/>
           <p:cNvSpPr/>
           <p:nvPr/>
         </p:nvSpPr>
@@ -9687,7 +9648,7 @@
       </p:sp>
       <p:sp>
         <p:nvSpPr>
-          <p:cNvPr id="21" name="TextBox 20"/>
+          <p:cNvPr id="20" name="TextBox 19"/>
           <p:cNvSpPr txBox="1"/>
           <p:nvPr/>
         </p:nvSpPr>
@@ -9726,7 +9687,7 @@
       </p:sp>
       <p:sp>
         <p:nvSpPr>
-          <p:cNvPr id="22" name="TextBox 21"/>
+          <p:cNvPr id="21" name="TextBox 20"/>
           <p:cNvSpPr txBox="1"/>
           <p:nvPr/>
         </p:nvSpPr>
@@ -9765,7 +9726,7 @@
       </p:sp>
       <p:cxnSp>
         <p:nvCxnSpPr>
-          <p:cNvPr id="23" name="Connector 22"/>
+          <p:cNvPr id="22" name="Connector 21"/>
           <p:cNvCxnSpPr/>
           <p:nvPr/>
         </p:nvCxnSpPr>
@@ -9800,7 +9761,7 @@
       </p:cxnSp>
       <p:sp>
         <p:nvSpPr>
-          <p:cNvPr id="24" name="Isosceles Triangle 23"/>
+          <p:cNvPr id="23" name="Isosceles Triangle 22"/>
           <p:cNvSpPr/>
           <p:nvPr/>
         </p:nvSpPr>
@@ -9844,7 +9805,7 @@
       </p:sp>
       <p:sp>
         <p:nvSpPr>
-          <p:cNvPr id="25" name="Rounded Rectangle 24"/>
+          <p:cNvPr id="24" name="Rounded Rectangle 23"/>
           <p:cNvSpPr/>
           <p:nvPr/>
         </p:nvSpPr>
@@ -9892,7 +9853,7 @@
       </p:sp>
       <p:sp>
         <p:nvSpPr>
-          <p:cNvPr id="26" name="Rectangle 25"/>
+          <p:cNvPr id="25" name="Rectangle 24"/>
           <p:cNvSpPr/>
           <p:nvPr/>
         </p:nvSpPr>
@@ -9936,7 +9897,7 @@
       </p:sp>
       <p:sp>
         <p:nvSpPr>
-          <p:cNvPr id="27" name="Rounded Rectangle 26"/>
+          <p:cNvPr id="26" name="Rounded Rectangle 25"/>
           <p:cNvSpPr/>
           <p:nvPr/>
         </p:nvSpPr>
@@ -9982,7 +9943,7 @@
       </p:sp>
       <p:sp>
         <p:nvSpPr>
-          <p:cNvPr id="28" name="TextBox 27"/>
+          <p:cNvPr id="27" name="TextBox 26"/>
           <p:cNvSpPr txBox="1"/>
           <p:nvPr/>
         </p:nvSpPr>
@@ -10021,7 +9982,7 @@
       </p:sp>
       <p:sp>
         <p:nvSpPr>
-          <p:cNvPr id="29" name="TextBox 28"/>
+          <p:cNvPr id="28" name="TextBox 27"/>
           <p:cNvSpPr txBox="1"/>
           <p:nvPr/>
         </p:nvSpPr>
@@ -10060,7 +10021,7 @@
       </p:sp>
       <p:cxnSp>
         <p:nvCxnSpPr>
-          <p:cNvPr id="30" name="Connector 29"/>
+          <p:cNvPr id="29" name="Connector 28"/>
           <p:cNvCxnSpPr/>
           <p:nvPr/>
         </p:nvCxnSpPr>
@@ -10095,7 +10056,7 @@
       </p:cxnSp>
       <p:sp>
         <p:nvSpPr>
-          <p:cNvPr id="31" name="Isosceles Triangle 30"/>
+          <p:cNvPr id="30" name="Isosceles Triangle 29"/>
           <p:cNvSpPr/>
           <p:nvPr/>
         </p:nvSpPr>
@@ -10139,7 +10100,7 @@
       </p:sp>
       <p:sp>
         <p:nvSpPr>
-          <p:cNvPr id="32" name="Rounded Rectangle 31"/>
+          <p:cNvPr id="31" name="Rounded Rectangle 30"/>
           <p:cNvSpPr/>
           <p:nvPr/>
         </p:nvSpPr>
@@ -10187,7 +10148,7 @@
       </p:sp>
       <p:sp>
         <p:nvSpPr>
-          <p:cNvPr id="33" name="Rectangle 32"/>
+          <p:cNvPr id="32" name="Rectangle 31"/>
           <p:cNvSpPr/>
           <p:nvPr/>
         </p:nvSpPr>
@@ -10231,7 +10192,7 @@
       </p:sp>
       <p:sp>
         <p:nvSpPr>
-          <p:cNvPr id="34" name="Rounded Rectangle 33"/>
+          <p:cNvPr id="33" name="Rounded Rectangle 32"/>
           <p:cNvSpPr/>
           <p:nvPr/>
         </p:nvSpPr>
@@ -10277,7 +10238,7 @@
       </p:sp>
       <p:sp>
         <p:nvSpPr>
-          <p:cNvPr id="35" name="TextBox 34"/>
+          <p:cNvPr id="34" name="TextBox 33"/>
           <p:cNvSpPr txBox="1"/>
           <p:nvPr/>
         </p:nvSpPr>
@@ -10316,7 +10277,7 @@
       </p:sp>
       <p:sp>
         <p:nvSpPr>
-          <p:cNvPr id="36" name="TextBox 35"/>
+          <p:cNvPr id="35" name="TextBox 34"/>
           <p:cNvSpPr txBox="1"/>
           <p:nvPr/>
         </p:nvSpPr>
@@ -10355,7 +10316,7 @@
       </p:sp>
       <p:cxnSp>
         <p:nvCxnSpPr>
-          <p:cNvPr id="37" name="Connector 36"/>
+          <p:cNvPr id="36" name="Connector 35"/>
           <p:cNvCxnSpPr/>
           <p:nvPr/>
         </p:nvCxnSpPr>
@@ -10390,7 +10351,7 @@
       </p:cxnSp>
       <p:sp>
         <p:nvSpPr>
-          <p:cNvPr id="38" name="Isosceles Triangle 37"/>
+          <p:cNvPr id="37" name="Isosceles Triangle 36"/>
           <p:cNvSpPr/>
           <p:nvPr/>
         </p:nvSpPr>
@@ -10434,7 +10395,7 @@
       </p:sp>
       <p:sp>
         <p:nvSpPr>
-          <p:cNvPr id="39" name="Rounded Rectangle 38"/>
+          <p:cNvPr id="38" name="Rounded Rectangle 37"/>
           <p:cNvSpPr/>
           <p:nvPr/>
         </p:nvSpPr>
@@ -10482,7 +10443,7 @@
       </p:sp>
       <p:sp>
         <p:nvSpPr>
-          <p:cNvPr id="40" name="Rectangle 39"/>
+          <p:cNvPr id="39" name="Rectangle 38"/>
           <p:cNvSpPr/>
           <p:nvPr/>
         </p:nvSpPr>
@@ -10526,7 +10487,7 @@
       </p:sp>
       <p:sp>
         <p:nvSpPr>
-          <p:cNvPr id="41" name="Rounded Rectangle 40"/>
+          <p:cNvPr id="40" name="Rounded Rectangle 39"/>
           <p:cNvSpPr/>
           <p:nvPr/>
         </p:nvSpPr>
@@ -10572,7 +10533,7 @@
       </p:sp>
       <p:sp>
         <p:nvSpPr>
-          <p:cNvPr id="42" name="TextBox 41"/>
+          <p:cNvPr id="41" name="TextBox 40"/>
           <p:cNvSpPr txBox="1"/>
           <p:nvPr/>
         </p:nvSpPr>
@@ -10611,7 +10572,7 @@
       </p:sp>
       <p:sp>
         <p:nvSpPr>
-          <p:cNvPr id="43" name="TextBox 42"/>
+          <p:cNvPr id="42" name="TextBox 41"/>
           <p:cNvSpPr txBox="1"/>
           <p:nvPr/>
         </p:nvSpPr>
@@ -10643,14 +10604,14 @@
                 </a:solidFill>
                 <a:latin typeface="PingFang SC"/>
               </a:rPr>
-              <a:t>观察回灌|选择准确率可评测</a:t>
+              <a:t>观察回灌</a:t>
             </a:r>
           </a:p>
         </p:txBody>
       </p:sp>
       <p:cxnSp>
         <p:nvCxnSpPr>
-          <p:cNvPr id="44" name="Connector 43"/>
+          <p:cNvPr id="43" name="Connector 42"/>
           <p:cNvCxnSpPr/>
           <p:nvPr/>
         </p:nvCxnSpPr>
@@ -10685,7 +10646,7 @@
       </p:cxnSp>
       <p:sp>
         <p:nvSpPr>
-          <p:cNvPr id="45" name="Isosceles Triangle 44"/>
+          <p:cNvPr id="44" name="Isosceles Triangle 43"/>
           <p:cNvSpPr/>
           <p:nvPr/>
         </p:nvSpPr>
@@ -10729,7 +10690,7 @@
       </p:sp>
       <p:sp>
         <p:nvSpPr>
-          <p:cNvPr id="46" name="Rounded Rectangle 45"/>
+          <p:cNvPr id="45" name="Rounded Rectangle 44"/>
           <p:cNvSpPr/>
           <p:nvPr/>
         </p:nvSpPr>
@@ -10775,7 +10736,7 @@
       </p:sp>
       <p:sp>
         <p:nvSpPr>
-          <p:cNvPr id="47" name="TextBox 46"/>
+          <p:cNvPr id="46" name="TextBox 45"/>
           <p:cNvSpPr txBox="1"/>
           <p:nvPr/>
         </p:nvSpPr>
@@ -10814,7 +10775,7 @@
       </p:sp>
       <p:sp>
         <p:nvSpPr>
-          <p:cNvPr id="48" name="TextBox 47"/>
+          <p:cNvPr id="47" name="TextBox 46"/>
           <p:cNvSpPr txBox="1"/>
           <p:nvPr/>
         </p:nvSpPr>
@@ -10853,7 +10814,7 @@
       </p:sp>
       <p:sp>
         <p:nvSpPr>
-          <p:cNvPr id="49" name="TextBox 48"/>
+          <p:cNvPr id="48" name="TextBox 47"/>
           <p:cNvSpPr txBox="1"/>
           <p:nvPr/>
         </p:nvSpPr>
@@ -13027,46 +12988,7 @@
       </p:sp>
       <p:sp>
         <p:nvSpPr>
-          <p:cNvPr id="5" name="TextBox 4"/>
-          <p:cNvSpPr txBox="1"/>
-          <p:nvPr/>
-        </p:nvSpPr>
-        <p:spPr>
-          <a:xfrm>
-            <a:off x="9334500" y="0"/>
-            <a:ext cx="2667000" cy="704850"/>
-          </a:xfrm>
-          <a:prstGeom prst="rect">
-            <a:avLst/>
-          </a:prstGeom>
-          <a:noFill/>
-        </p:spPr>
-        <p:txBody>
-          <a:bodyPr wrap="square" anchor="ctr">
-            <a:spAutoFit/>
-          </a:bodyPr>
-          <a:lstStyle/>
-          <a:p>
-            <a:pPr algn="r">
-              <a:lnSpc>
-                <a:spcPct val="100000"/>
-              </a:lnSpc>
-            </a:pPr>
-            <a:r>
-              <a:rPr sz="1100" b="0">
-                <a:solidFill>
-                  <a:srgbClr val="94A3B8"/>
-                </a:solidFill>
-                <a:latin typeface="PingFang SC"/>
-              </a:rPr>
-              <a:t>源码:tools/runtime.py</a:t>
-            </a:r>
-          </a:p>
-        </p:txBody>
-      </p:sp>
-      <p:sp>
-        <p:nvSpPr>
-          <p:cNvPr id="6" name="Rounded Rectangle 5"/>
+          <p:cNvPr id="5" name="Rounded Rectangle 4"/>
           <p:cNvSpPr/>
           <p:nvPr/>
         </p:nvSpPr>
@@ -13114,7 +13036,7 @@
       </p:sp>
       <p:sp>
         <p:nvSpPr>
-          <p:cNvPr id="7" name="Rectangle 6"/>
+          <p:cNvPr id="6" name="Rectangle 5"/>
           <p:cNvSpPr/>
           <p:nvPr/>
         </p:nvSpPr>
@@ -13158,7 +13080,7 @@
       </p:sp>
       <p:sp>
         <p:nvSpPr>
-          <p:cNvPr id="8" name="Rounded Rectangle 7"/>
+          <p:cNvPr id="7" name="Rounded Rectangle 6"/>
           <p:cNvSpPr/>
           <p:nvPr/>
         </p:nvSpPr>
@@ -13204,7 +13126,7 @@
       </p:sp>
       <p:sp>
         <p:nvSpPr>
-          <p:cNvPr id="9" name="TextBox 8"/>
+          <p:cNvPr id="8" name="TextBox 7"/>
           <p:cNvSpPr txBox="1"/>
           <p:nvPr/>
         </p:nvSpPr>
@@ -13243,7 +13165,7 @@
       </p:sp>
       <p:sp>
         <p:nvSpPr>
-          <p:cNvPr id="10" name="TextBox 9"/>
+          <p:cNvPr id="9" name="TextBox 8"/>
           <p:cNvSpPr txBox="1"/>
           <p:nvPr/>
         </p:nvSpPr>
@@ -13282,7 +13204,7 @@
       </p:sp>
       <p:sp>
         <p:nvSpPr>
-          <p:cNvPr id="11" name="Rounded Rectangle 10"/>
+          <p:cNvPr id="10" name="Rounded Rectangle 9"/>
           <p:cNvSpPr/>
           <p:nvPr/>
         </p:nvSpPr>
@@ -13330,7 +13252,7 @@
       </p:sp>
       <p:sp>
         <p:nvSpPr>
-          <p:cNvPr id="12" name="Rectangle 11"/>
+          <p:cNvPr id="11" name="Rectangle 10"/>
           <p:cNvSpPr/>
           <p:nvPr/>
         </p:nvSpPr>
@@ -13374,7 +13296,7 @@
       </p:sp>
       <p:sp>
         <p:nvSpPr>
-          <p:cNvPr id="13" name="Rounded Rectangle 12"/>
+          <p:cNvPr id="12" name="Rounded Rectangle 11"/>
           <p:cNvSpPr/>
           <p:nvPr/>
         </p:nvSpPr>
@@ -13420,7 +13342,7 @@
       </p:sp>
       <p:sp>
         <p:nvSpPr>
-          <p:cNvPr id="14" name="TextBox 13"/>
+          <p:cNvPr id="13" name="TextBox 12"/>
           <p:cNvSpPr txBox="1"/>
           <p:nvPr/>
         </p:nvSpPr>
@@ -13459,7 +13381,7 @@
       </p:sp>
       <p:sp>
         <p:nvSpPr>
-          <p:cNvPr id="15" name="TextBox 14"/>
+          <p:cNvPr id="14" name="TextBox 13"/>
           <p:cNvSpPr txBox="1"/>
           <p:nvPr/>
         </p:nvSpPr>
@@ -13498,7 +13420,7 @@
       </p:sp>
       <p:cxnSp>
         <p:nvCxnSpPr>
-          <p:cNvPr id="16" name="Connector 15"/>
+          <p:cNvPr id="15" name="Connector 14"/>
           <p:cNvCxnSpPr/>
           <p:nvPr/>
         </p:nvCxnSpPr>
@@ -13533,7 +13455,7 @@
       </p:cxnSp>
       <p:sp>
         <p:nvSpPr>
-          <p:cNvPr id="17" name="Isosceles Triangle 16"/>
+          <p:cNvPr id="16" name="Isosceles Triangle 15"/>
           <p:cNvSpPr/>
           <p:nvPr/>
         </p:nvSpPr>
@@ -13577,7 +13499,7 @@
       </p:sp>
       <p:sp>
         <p:nvSpPr>
-          <p:cNvPr id="18" name="Rounded Rectangle 17"/>
+          <p:cNvPr id="17" name="Rounded Rectangle 16"/>
           <p:cNvSpPr/>
           <p:nvPr/>
         </p:nvSpPr>
@@ -13625,7 +13547,7 @@
       </p:sp>
       <p:sp>
         <p:nvSpPr>
-          <p:cNvPr id="19" name="Rectangle 18"/>
+          <p:cNvPr id="18" name="Rectangle 17"/>
           <p:cNvSpPr/>
           <p:nvPr/>
         </p:nvSpPr>
@@ -13669,7 +13591,7 @@
       </p:sp>
       <p:sp>
         <p:nvSpPr>
-          <p:cNvPr id="20" name="Rounded Rectangle 19"/>
+          <p:cNvPr id="19" name="Rounded Rectangle 18"/>
           <p:cNvSpPr/>
           <p:nvPr/>
         </p:nvSpPr>
@@ -13715,7 +13637,7 @@
       </p:sp>
       <p:sp>
         <p:nvSpPr>
-          <p:cNvPr id="21" name="TextBox 20"/>
+          <p:cNvPr id="20" name="TextBox 19"/>
           <p:cNvSpPr txBox="1"/>
           <p:nvPr/>
         </p:nvSpPr>
@@ -13754,7 +13676,7 @@
       </p:sp>
       <p:sp>
         <p:nvSpPr>
-          <p:cNvPr id="22" name="TextBox 21"/>
+          <p:cNvPr id="21" name="TextBox 20"/>
           <p:cNvSpPr txBox="1"/>
           <p:nvPr/>
         </p:nvSpPr>
@@ -13793,7 +13715,7 @@
       </p:sp>
       <p:cxnSp>
         <p:nvCxnSpPr>
-          <p:cNvPr id="23" name="Connector 22"/>
+          <p:cNvPr id="22" name="Connector 21"/>
           <p:cNvCxnSpPr/>
           <p:nvPr/>
         </p:nvCxnSpPr>
@@ -13828,7 +13750,7 @@
       </p:cxnSp>
       <p:sp>
         <p:nvSpPr>
-          <p:cNvPr id="24" name="Isosceles Triangle 23"/>
+          <p:cNvPr id="23" name="Isosceles Triangle 22"/>
           <p:cNvSpPr/>
           <p:nvPr/>
         </p:nvSpPr>
@@ -13872,7 +13794,7 @@
       </p:sp>
       <p:sp>
         <p:nvSpPr>
-          <p:cNvPr id="25" name="Rounded Rectangle 24"/>
+          <p:cNvPr id="24" name="Rounded Rectangle 23"/>
           <p:cNvSpPr/>
           <p:nvPr/>
         </p:nvSpPr>
@@ -13920,7 +13842,7 @@
       </p:sp>
       <p:sp>
         <p:nvSpPr>
-          <p:cNvPr id="26" name="Rectangle 25"/>
+          <p:cNvPr id="25" name="Rectangle 24"/>
           <p:cNvSpPr/>
           <p:nvPr/>
         </p:nvSpPr>
@@ -13964,7 +13886,7 @@
       </p:sp>
       <p:sp>
         <p:nvSpPr>
-          <p:cNvPr id="27" name="Rounded Rectangle 26"/>
+          <p:cNvPr id="26" name="Rounded Rectangle 25"/>
           <p:cNvSpPr/>
           <p:nvPr/>
         </p:nvSpPr>
@@ -14010,7 +13932,7 @@
       </p:sp>
       <p:sp>
         <p:nvSpPr>
-          <p:cNvPr id="28" name="TextBox 27"/>
+          <p:cNvPr id="27" name="TextBox 26"/>
           <p:cNvSpPr txBox="1"/>
           <p:nvPr/>
         </p:nvSpPr>
@@ -14049,7 +13971,7 @@
       </p:sp>
       <p:sp>
         <p:nvSpPr>
-          <p:cNvPr id="29" name="TextBox 28"/>
+          <p:cNvPr id="28" name="TextBox 27"/>
           <p:cNvSpPr txBox="1"/>
           <p:nvPr/>
         </p:nvSpPr>
@@ -14088,7 +14010,7 @@
       </p:sp>
       <p:cxnSp>
         <p:nvCxnSpPr>
-          <p:cNvPr id="30" name="Connector 29"/>
+          <p:cNvPr id="29" name="Connector 28"/>
           <p:cNvCxnSpPr/>
           <p:nvPr/>
         </p:nvCxnSpPr>
@@ -14123,7 +14045,7 @@
       </p:cxnSp>
       <p:sp>
         <p:nvSpPr>
-          <p:cNvPr id="31" name="Isosceles Triangle 30"/>
+          <p:cNvPr id="30" name="Isosceles Triangle 29"/>
           <p:cNvSpPr/>
           <p:nvPr/>
         </p:nvSpPr>
@@ -14167,7 +14089,7 @@
       </p:sp>
       <p:sp>
         <p:nvSpPr>
-          <p:cNvPr id="32" name="Rounded Rectangle 31"/>
+          <p:cNvPr id="31" name="Rounded Rectangle 30"/>
           <p:cNvSpPr/>
           <p:nvPr/>
         </p:nvSpPr>
@@ -14215,7 +14137,7 @@
       </p:sp>
       <p:sp>
         <p:nvSpPr>
-          <p:cNvPr id="33" name="Rectangle 32"/>
+          <p:cNvPr id="32" name="Rectangle 31"/>
           <p:cNvSpPr/>
           <p:nvPr/>
         </p:nvSpPr>
@@ -14259,7 +14181,7 @@
       </p:sp>
       <p:sp>
         <p:nvSpPr>
-          <p:cNvPr id="34" name="Rounded Rectangle 33"/>
+          <p:cNvPr id="33" name="Rounded Rectangle 32"/>
           <p:cNvSpPr/>
           <p:nvPr/>
         </p:nvSpPr>
@@ -14305,7 +14227,7 @@
       </p:sp>
       <p:sp>
         <p:nvSpPr>
-          <p:cNvPr id="35" name="TextBox 34"/>
+          <p:cNvPr id="34" name="TextBox 33"/>
           <p:cNvSpPr txBox="1"/>
           <p:nvPr/>
         </p:nvSpPr>
@@ -14344,7 +14266,7 @@
       </p:sp>
       <p:sp>
         <p:nvSpPr>
-          <p:cNvPr id="36" name="TextBox 35"/>
+          <p:cNvPr id="35" name="TextBox 34"/>
           <p:cNvSpPr txBox="1"/>
           <p:nvPr/>
         </p:nvSpPr>
@@ -14383,7 +14305,7 @@
       </p:sp>
       <p:cxnSp>
         <p:nvCxnSpPr>
-          <p:cNvPr id="37" name="Connector 36"/>
+          <p:cNvPr id="36" name="Connector 35"/>
           <p:cNvCxnSpPr/>
           <p:nvPr/>
         </p:nvCxnSpPr>
@@ -14418,7 +14340,7 @@
       </p:cxnSp>
       <p:sp>
         <p:nvSpPr>
-          <p:cNvPr id="38" name="Isosceles Triangle 37"/>
+          <p:cNvPr id="37" name="Isosceles Triangle 36"/>
           <p:cNvSpPr/>
           <p:nvPr/>
         </p:nvSpPr>
@@ -14462,7 +14384,7 @@
       </p:sp>
       <p:sp>
         <p:nvSpPr>
-          <p:cNvPr id="39" name="Rounded Rectangle 38"/>
+          <p:cNvPr id="38" name="Rounded Rectangle 37"/>
           <p:cNvSpPr/>
           <p:nvPr/>
         </p:nvSpPr>
@@ -14510,7 +14432,7 @@
       </p:sp>
       <p:sp>
         <p:nvSpPr>
-          <p:cNvPr id="40" name="Rectangle 39"/>
+          <p:cNvPr id="39" name="Rectangle 38"/>
           <p:cNvSpPr/>
           <p:nvPr/>
         </p:nvSpPr>
@@ -14554,7 +14476,7 @@
       </p:sp>
       <p:sp>
         <p:nvSpPr>
-          <p:cNvPr id="41" name="Rounded Rectangle 40"/>
+          <p:cNvPr id="40" name="Rounded Rectangle 39"/>
           <p:cNvSpPr/>
           <p:nvPr/>
         </p:nvSpPr>
@@ -14600,7 +14522,7 @@
       </p:sp>
       <p:sp>
         <p:nvSpPr>
-          <p:cNvPr id="42" name="TextBox 41"/>
+          <p:cNvPr id="41" name="TextBox 40"/>
           <p:cNvSpPr txBox="1"/>
           <p:nvPr/>
         </p:nvSpPr>
@@ -14639,7 +14561,7 @@
       </p:sp>
       <p:sp>
         <p:nvSpPr>
-          <p:cNvPr id="43" name="TextBox 42"/>
+          <p:cNvPr id="42" name="TextBox 41"/>
           <p:cNvSpPr txBox="1"/>
           <p:nvPr/>
         </p:nvSpPr>
@@ -14671,14 +14593,14 @@
                 </a:solidFill>
                 <a:latin typeface="PingFang SC"/>
               </a:rPr>
-              <a:t>审计落盘(脱敏)|源码:tools/runtime.py</a:t>
+              <a:t>审计落盘(脱敏)</a:t>
             </a:r>
           </a:p>
         </p:txBody>
       </p:sp>
       <p:cxnSp>
         <p:nvCxnSpPr>
-          <p:cNvPr id="44" name="Connector 43"/>
+          <p:cNvPr id="43" name="Connector 42"/>
           <p:cNvCxnSpPr/>
           <p:nvPr/>
         </p:nvCxnSpPr>
@@ -14713,7 +14635,7 @@
       </p:cxnSp>
       <p:sp>
         <p:nvSpPr>
-          <p:cNvPr id="45" name="Isosceles Triangle 44"/>
+          <p:cNvPr id="44" name="Isosceles Triangle 43"/>
           <p:cNvSpPr/>
           <p:nvPr/>
         </p:nvSpPr>
@@ -14757,7 +14679,7 @@
       </p:sp>
       <p:sp>
         <p:nvSpPr>
-          <p:cNvPr id="46" name="Rounded Rectangle 45"/>
+          <p:cNvPr id="45" name="Rounded Rectangle 44"/>
           <p:cNvSpPr/>
           <p:nvPr/>
         </p:nvSpPr>
@@ -14803,7 +14725,7 @@
       </p:sp>
       <p:sp>
         <p:nvSpPr>
-          <p:cNvPr id="47" name="TextBox 46"/>
+          <p:cNvPr id="46" name="TextBox 45"/>
           <p:cNvSpPr txBox="1"/>
           <p:nvPr/>
         </p:nvSpPr>
@@ -14842,7 +14764,7 @@
       </p:sp>
       <p:sp>
         <p:nvSpPr>
-          <p:cNvPr id="48" name="TextBox 47"/>
+          <p:cNvPr id="47" name="TextBox 46"/>
           <p:cNvSpPr txBox="1"/>
           <p:nvPr/>
         </p:nvSpPr>
@@ -14881,7 +14803,7 @@
       </p:sp>
       <p:sp>
         <p:nvSpPr>
-          <p:cNvPr id="49" name="TextBox 48"/>
+          <p:cNvPr id="48" name="TextBox 47"/>
           <p:cNvSpPr txBox="1"/>
           <p:nvPr/>
         </p:nvSpPr>
@@ -17659,60 +17581,21 @@
                 </a:solidFill>
                 <a:latin typeface="PingFang SC"/>
               </a:rPr>
-              <a:t>get_weather 端到端实测,$ executor.execute("get_weather", {"city": "Beijing"});ToolResult(ok=True, output='sunny::Beijing', latency_ms=0.4);AuditEvent(tool='get_weather', args={'city':'Beijing'});# READ 工具+agent 角色:直接放行</a:t>
-            </a:r>
-          </a:p>
-        </p:txBody>
-      </p:sp>
-      <p:sp>
-        <p:nvSpPr>
-          <p:cNvPr id="5" name="TextBox 4"/>
-          <p:cNvSpPr txBox="1"/>
-          <p:nvPr/>
-        </p:nvSpPr>
-        <p:spPr>
-          <a:xfrm>
-            <a:off x="9334500" y="0"/>
-            <a:ext cx="2667000" cy="704850"/>
-          </a:xfrm>
-          <a:prstGeom prst="rect">
-            <a:avLst/>
-          </a:prstGeom>
-          <a:noFill/>
-        </p:spPr>
-        <p:txBody>
-          <a:bodyPr wrap="square" anchor="ctr">
-            <a:spAutoFit/>
-          </a:bodyPr>
-          <a:lstStyle/>
-          <a:p>
-            <a:pPr algn="r">
-              <a:lnSpc>
-                <a:spcPct val="100000"/>
-              </a:lnSpc>
-            </a:pPr>
-            <a:r>
-              <a:rPr sz="1100" b="0">
-                <a:solidFill>
-                  <a:srgbClr val="94A3B8"/>
-                </a:solidFill>
-                <a:latin typeface="PingFang SC"/>
-              </a:rPr>
-              <a:t>tests 真实断言</a:t>
-            </a:r>
-          </a:p>
-        </p:txBody>
-      </p:sp>
-      <p:sp>
-        <p:nvSpPr>
-          <p:cNvPr id="6" name="Rounded Rectangle 5"/>
-          <p:cNvSpPr/>
-          <p:nvPr/>
-        </p:nvSpPr>
-        <p:spPr>
-          <a:xfrm>
-            <a:off x="1333500" y="952500"/>
-            <a:ext cx="9525000" cy="5048250"/>
+              <a:t>get_weather 端到端实测</a:t>
+            </a:r>
+          </a:p>
+        </p:txBody>
+      </p:sp>
+      <p:sp>
+        <p:nvSpPr>
+          <p:cNvPr id="5" name="Rounded Rectangle 4"/>
+          <p:cNvSpPr/>
+          <p:nvPr/>
+        </p:nvSpPr>
+        <p:spPr>
+          <a:xfrm>
+            <a:off x="1333500" y="1047750"/>
+            <a:ext cx="9525000" cy="2381250"/>
           </a:xfrm>
           <a:prstGeom prst="roundRect">
             <a:avLst>
@@ -17751,13 +17634,13 @@
       </p:sp>
       <p:sp>
         <p:nvSpPr>
-          <p:cNvPr id="7" name="Rectangle 6"/>
-          <p:cNvSpPr/>
-          <p:nvPr/>
-        </p:nvSpPr>
-        <p:spPr>
-          <a:xfrm>
-            <a:off x="1333500" y="952500"/>
+          <p:cNvPr id="6" name="Rectangle 5"/>
+          <p:cNvSpPr/>
+          <p:nvPr/>
+        </p:nvSpPr>
+        <p:spPr>
+          <a:xfrm>
+            <a:off x="1333500" y="1047750"/>
             <a:ext cx="9525000" cy="381000"/>
           </a:xfrm>
           <a:prstGeom prst="rect">
@@ -17795,13 +17678,13 @@
       </p:sp>
       <p:sp>
         <p:nvSpPr>
-          <p:cNvPr id="8" name="Rounded Rectangle 7"/>
-          <p:cNvSpPr/>
-          <p:nvPr/>
-        </p:nvSpPr>
-        <p:spPr>
-          <a:xfrm>
-            <a:off x="1504950" y="1085850"/>
+          <p:cNvPr id="7" name="Rounded Rectangle 6"/>
+          <p:cNvSpPr/>
+          <p:nvPr/>
+        </p:nvSpPr>
+        <p:spPr>
+          <a:xfrm>
+            <a:off x="1504950" y="1181100"/>
             <a:ext cx="123825" cy="123825"/>
           </a:xfrm>
           <a:prstGeom prst="roundRect">
@@ -17841,13 +17724,13 @@
       </p:sp>
       <p:sp>
         <p:nvSpPr>
-          <p:cNvPr id="9" name="Rounded Rectangle 8"/>
-          <p:cNvSpPr/>
-          <p:nvPr/>
-        </p:nvSpPr>
-        <p:spPr>
-          <a:xfrm>
-            <a:off x="1752600" y="1085850"/>
+          <p:cNvPr id="8" name="Rounded Rectangle 7"/>
+          <p:cNvSpPr/>
+          <p:nvPr/>
+        </p:nvSpPr>
+        <p:spPr>
+          <a:xfrm>
+            <a:off x="1752600" y="1181100"/>
             <a:ext cx="123825" cy="123825"/>
           </a:xfrm>
           <a:prstGeom prst="roundRect">
@@ -17887,13 +17770,13 @@
       </p:sp>
       <p:sp>
         <p:nvSpPr>
-          <p:cNvPr id="10" name="Rounded Rectangle 9"/>
-          <p:cNvSpPr/>
-          <p:nvPr/>
-        </p:nvSpPr>
-        <p:spPr>
-          <a:xfrm>
-            <a:off x="2000250" y="1085850"/>
+          <p:cNvPr id="9" name="Rounded Rectangle 8"/>
+          <p:cNvSpPr/>
+          <p:nvPr/>
+        </p:nvSpPr>
+        <p:spPr>
+          <a:xfrm>
+            <a:off x="2000250" y="1181100"/>
             <a:ext cx="123825" cy="123825"/>
           </a:xfrm>
           <a:prstGeom prst="roundRect">
@@ -17933,13 +17816,13 @@
       </p:sp>
       <p:sp>
         <p:nvSpPr>
-          <p:cNvPr id="11" name="TextBox 10"/>
+          <p:cNvPr id="10" name="TextBox 9"/>
           <p:cNvSpPr txBox="1"/>
           <p:nvPr/>
         </p:nvSpPr>
         <p:spPr>
           <a:xfrm>
-            <a:off x="2381250" y="952500"/>
+            <a:off x="2381250" y="1047750"/>
             <a:ext cx="8286750" cy="381000"/>
           </a:xfrm>
           <a:prstGeom prst="rect">
@@ -17972,14 +17855,14 @@
       </p:sp>
       <p:sp>
         <p:nvSpPr>
-          <p:cNvPr id="12" name="TextBox 11"/>
+          <p:cNvPr id="11" name="TextBox 10"/>
           <p:cNvSpPr txBox="1"/>
           <p:nvPr/>
         </p:nvSpPr>
         <p:spPr>
           <a:xfrm>
-            <a:off x="1562100" y="1485900"/>
-            <a:ext cx="9067800" cy="4381500"/>
+            <a:off x="1562100" y="1581150"/>
+            <a:ext cx="9067800" cy="1714500"/>
           </a:xfrm>
           <a:prstGeom prst="rect">
             <a:avLst/>
@@ -17991,6 +17874,22 @@
             <a:spAutoFit/>
           </a:bodyPr>
           <a:lstStyle/>
+          <a:p>
+            <a:pPr>
+              <a:lnSpc>
+                <a:spcPct val="115000"/>
+              </a:lnSpc>
+            </a:pPr>
+            <a:r>
+              <a:rPr sz="1300" b="1">
+                <a:solidFill>
+                  <a:srgbClr val="34D399"/>
+                </a:solidFill>
+                <a:latin typeface="Menlo"/>
+              </a:rPr>
+              <a:t>$ executor.execute("get_weather", {"city": "Beijing"})</a:t>
+            </a:r>
+          </a:p>
           <a:p>
             <a:pPr>
               <a:lnSpc>
@@ -18004,14 +17903,46 @@
                 </a:solidFill>
                 <a:latin typeface="Menlo"/>
               </a:rPr>
-              <a:t>tests 真实断言</a:t>
-            </a:r>
-          </a:p>
-        </p:txBody>
-      </p:sp>
-      <p:sp>
-        <p:nvSpPr>
-          <p:cNvPr id="13" name="TextBox 12"/>
+              <a:t>ToolResult(ok=True, output='sunny::Beijing', latency_ms=0.4)</a:t>
+            </a:r>
+          </a:p>
+          <a:p>
+            <a:pPr>
+              <a:lnSpc>
+                <a:spcPct val="115000"/>
+              </a:lnSpc>
+            </a:pPr>
+            <a:r>
+              <a:rPr sz="1300">
+                <a:solidFill>
+                  <a:srgbClr val="CBD5E1"/>
+                </a:solidFill>
+                <a:latin typeface="Menlo"/>
+              </a:rPr>
+              <a:t>AuditEvent(tool='get_weather', args={'city':'Beijing'})</a:t>
+            </a:r>
+          </a:p>
+          <a:p>
+            <a:pPr>
+              <a:lnSpc>
+                <a:spcPct val="115000"/>
+              </a:lnSpc>
+            </a:pPr>
+            <a:r>
+              <a:rPr sz="1300">
+                <a:solidFill>
+                  <a:srgbClr val="94A3B8"/>
+                </a:solidFill>
+                <a:latin typeface="Menlo"/>
+              </a:rPr>
+              <a:t># READ 工具+agent 角色:直接放行</a:t>
+            </a:r>
+          </a:p>
+        </p:txBody>
+      </p:sp>
+      <p:sp>
+        <p:nvSpPr>
+          <p:cNvPr id="12" name="TextBox 11"/>
           <p:cNvSpPr txBox="1"/>
           <p:nvPr/>
         </p:nvSpPr>
@@ -18050,7 +17981,7 @@
       </p:sp>
       <p:sp>
         <p:nvSpPr>
-          <p:cNvPr id="14" name="TextBox 13"/>
+          <p:cNvPr id="13" name="TextBox 12"/>
           <p:cNvSpPr txBox="1"/>
           <p:nvPr/>
         </p:nvSpPr>
@@ -27265,106 +27196,14 @@
       </p:sp>
       <p:sp>
         <p:nvSpPr>
-          <p:cNvPr id="6" name="Rounded Rectangle 5"/>
-          <p:cNvSpPr/>
-          <p:nvPr/>
-        </p:nvSpPr>
-        <p:spPr>
-          <a:xfrm>
-            <a:off x="1905000" y="952500"/>
-            <a:ext cx="2076450" cy="1023937"/>
-          </a:xfrm>
-          <a:prstGeom prst="roundRect">
-            <a:avLst>
-              <a:gd name="adj" fmla="val 8000"/>
-            </a:avLst>
-          </a:prstGeom>
-          <a:solidFill>
-            <a:srgbClr val="FFFFFF"/>
-          </a:solidFill>
-          <a:ln w="12700">
-            <a:solidFill>
-              <a:srgbClr val="2563EB"/>
-            </a:solidFill>
-          </a:ln>
-          <a:effectLst/>
-        </p:spPr>
-        <p:style>
-          <a:lnRef idx="1">
-            <a:schemeClr val="accent1"/>
-          </a:lnRef>
-          <a:fillRef idx="3">
-            <a:schemeClr val="accent1"/>
-          </a:fillRef>
-          <a:effectRef idx="2">
-            <a:schemeClr val="accent1"/>
-          </a:effectRef>
-          <a:fontRef idx="minor">
-            <a:schemeClr val="lt1"/>
-          </a:fontRef>
-        </p:style>
-        <p:txBody>
-          <a:bodyPr rtlCol="0" anchor="ctr"/>
-          <a:lstStyle/>
-          <a:p>
-            <a:pPr algn="ctr"/>
-          </a:p>
-        </p:txBody>
-      </p:sp>
-      <p:sp>
-        <p:nvSpPr>
-          <p:cNvPr id="7" name="Rectangle 6"/>
-          <p:cNvSpPr/>
-          <p:nvPr/>
-        </p:nvSpPr>
-        <p:spPr>
-          <a:xfrm>
-            <a:off x="1905000" y="952500"/>
-            <a:ext cx="47625" cy="1023937"/>
-          </a:xfrm>
-          <a:prstGeom prst="rect">
-            <a:avLst/>
-          </a:prstGeom>
-          <a:solidFill>
-            <a:srgbClr val="2563EB"/>
-          </a:solidFill>
-          <a:ln>
-            <a:noFill/>
-          </a:ln>
-          <a:effectLst/>
-        </p:spPr>
-        <p:style>
-          <a:lnRef idx="1">
-            <a:schemeClr val="accent1"/>
-          </a:lnRef>
-          <a:fillRef idx="3">
-            <a:schemeClr val="accent1"/>
-          </a:fillRef>
-          <a:effectRef idx="2">
-            <a:schemeClr val="accent1"/>
-          </a:effectRef>
-          <a:fontRef idx="minor">
-            <a:schemeClr val="lt1"/>
-          </a:fontRef>
-        </p:style>
-        <p:txBody>
-          <a:bodyPr rtlCol="0" anchor="ctr"/>
-          <a:lstStyle/>
-          <a:p>
-            <a:pPr algn="ctr"/>
-          </a:p>
-        </p:txBody>
-      </p:sp>
-      <p:sp>
-        <p:nvSpPr>
-          <p:cNvPr id="8" name="TextBox 7"/>
+          <p:cNvPr id="6" name="TextBox 5"/>
           <p:cNvSpPr txBox="1"/>
           <p:nvPr/>
         </p:nvSpPr>
         <p:spPr>
           <a:xfrm>
-            <a:off x="2038350" y="952500"/>
-            <a:ext cx="1847850" cy="1023937"/>
+            <a:off x="1962150" y="685800"/>
+            <a:ext cx="1905000" cy="209550"/>
           </a:xfrm>
           <a:prstGeom prst="rect">
             <a:avLst/>
@@ -27383,9 +27222,140 @@
               </a:lnSpc>
             </a:pPr>
             <a:r>
-              <a:rPr sz="1200" b="1">
+              <a:rPr sz="1100" b="1">
                 <a:solidFill>
-                  <a:srgbClr val="475569"/>
+                  <a:srgbClr val="2563EB"/>
+                </a:solidFill>
+                <a:latin typeface="PingFang SC"/>
+              </a:rPr>
+              <a:t>L1</a:t>
+            </a:r>
+          </a:p>
+        </p:txBody>
+      </p:sp>
+      <p:sp>
+        <p:nvSpPr>
+          <p:cNvPr id="7" name="Rounded Rectangle 6"/>
+          <p:cNvSpPr/>
+          <p:nvPr/>
+        </p:nvSpPr>
+        <p:spPr>
+          <a:xfrm>
+            <a:off x="1905000" y="952500"/>
+            <a:ext cx="2076450" cy="1023937"/>
+          </a:xfrm>
+          <a:prstGeom prst="roundRect">
+            <a:avLst>
+              <a:gd name="adj" fmla="val 8000"/>
+            </a:avLst>
+          </a:prstGeom>
+          <a:solidFill>
+            <a:srgbClr val="FFFFFF"/>
+          </a:solidFill>
+          <a:ln w="12700">
+            <a:solidFill>
+              <a:srgbClr val="2563EB"/>
+            </a:solidFill>
+          </a:ln>
+          <a:effectLst/>
+        </p:spPr>
+        <p:style>
+          <a:lnRef idx="1">
+            <a:schemeClr val="accent1"/>
+          </a:lnRef>
+          <a:fillRef idx="3">
+            <a:schemeClr val="accent1"/>
+          </a:fillRef>
+          <a:effectRef idx="2">
+            <a:schemeClr val="accent1"/>
+          </a:effectRef>
+          <a:fontRef idx="minor">
+            <a:schemeClr val="lt1"/>
+          </a:fontRef>
+        </p:style>
+        <p:txBody>
+          <a:bodyPr rtlCol="0" anchor="ctr"/>
+          <a:lstStyle/>
+          <a:p>
+            <a:pPr algn="ctr"/>
+          </a:p>
+        </p:txBody>
+      </p:sp>
+      <p:sp>
+        <p:nvSpPr>
+          <p:cNvPr id="8" name="Rectangle 7"/>
+          <p:cNvSpPr/>
+          <p:nvPr/>
+        </p:nvSpPr>
+        <p:spPr>
+          <a:xfrm>
+            <a:off x="1905000" y="952500"/>
+            <a:ext cx="47625" cy="1023937"/>
+          </a:xfrm>
+          <a:prstGeom prst="rect">
+            <a:avLst/>
+          </a:prstGeom>
+          <a:solidFill>
+            <a:srgbClr val="2563EB"/>
+          </a:solidFill>
+          <a:ln>
+            <a:noFill/>
+          </a:ln>
+          <a:effectLst/>
+        </p:spPr>
+        <p:style>
+          <a:lnRef idx="1">
+            <a:schemeClr val="accent1"/>
+          </a:lnRef>
+          <a:fillRef idx="3">
+            <a:schemeClr val="accent1"/>
+          </a:fillRef>
+          <a:effectRef idx="2">
+            <a:schemeClr val="accent1"/>
+          </a:effectRef>
+          <a:fontRef idx="minor">
+            <a:schemeClr val="lt1"/>
+          </a:fontRef>
+        </p:style>
+        <p:txBody>
+          <a:bodyPr rtlCol="0" anchor="ctr"/>
+          <a:lstStyle/>
+          <a:p>
+            <a:pPr algn="ctr"/>
+          </a:p>
+        </p:txBody>
+      </p:sp>
+      <p:sp>
+        <p:nvSpPr>
+          <p:cNvPr id="9" name="TextBox 8"/>
+          <p:cNvSpPr txBox="1"/>
+          <p:nvPr/>
+        </p:nvSpPr>
+        <p:spPr>
+          <a:xfrm>
+            <a:off x="2057400" y="952500"/>
+            <a:ext cx="1809750" cy="1023937"/>
+          </a:xfrm>
+          <a:prstGeom prst="rect">
+            <a:avLst/>
+          </a:prstGeom>
+          <a:noFill/>
+        </p:spPr>
+        <p:txBody>
+          <a:bodyPr wrap="none" anchor="ctr">
+            <a:spAutoFit/>
+          </a:bodyPr>
+          <a:lstStyle/>
+          <a:p>
+            <a:pPr algn="l">
+              <a:lnSpc>
+                <a:spcPct val="115000"/>
+              </a:lnSpc>
+            </a:pPr>
+            <a:r>
+              <a:rPr sz="1100" b="1">
+                <a:solidFill>
+                  <a:srgbClr val="0B1D3A"/>
                 </a:solidFill>
                 <a:latin typeface="PingFang SC"/>
               </a:rPr>
@@ -27396,7 +27366,7 @@
       </p:sp>
       <p:sp>
         <p:nvSpPr>
-          <p:cNvPr id="9" name="Rounded Rectangle 8"/>
+          <p:cNvPr id="10" name="Rounded Rectangle 9"/>
           <p:cNvSpPr/>
           <p:nvPr/>
         </p:nvSpPr>
@@ -27444,7 +27414,7 @@
       </p:sp>
       <p:sp>
         <p:nvSpPr>
-          <p:cNvPr id="10" name="Rectangle 9"/>
+          <p:cNvPr id="11" name="Rectangle 10"/>
           <p:cNvSpPr/>
           <p:nvPr/>
         </p:nvSpPr>
@@ -27488,14 +27458,527 @@
       </p:sp>
       <p:sp>
         <p:nvSpPr>
-          <p:cNvPr id="11" name="TextBox 10"/>
+          <p:cNvPr id="12" name="TextBox 11"/>
           <p:cNvSpPr txBox="1"/>
           <p:nvPr/>
         </p:nvSpPr>
         <p:spPr>
           <a:xfrm>
-            <a:off x="4267200" y="952500"/>
-            <a:ext cx="1847850" cy="1023937"/>
+            <a:off x="4286250" y="952500"/>
+            <a:ext cx="1809750" cy="1023937"/>
+          </a:xfrm>
+          <a:prstGeom prst="rect">
+            <a:avLst/>
+          </a:prstGeom>
+          <a:noFill/>
+        </p:spPr>
+        <p:txBody>
+          <a:bodyPr wrap="none" anchor="ctr">
+            <a:spAutoFit/>
+          </a:bodyPr>
+          <a:lstStyle/>
+          <a:p>
+            <a:pPr algn="l">
+              <a:lnSpc>
+                <a:spcPct val="115000"/>
+              </a:lnSpc>
+            </a:pPr>
+            <a:r>
+              <a:rPr sz="1300" b="1">
+                <a:solidFill>
+                  <a:srgbClr val="0B1D3A"/>
+                </a:solidFill>
+                <a:latin typeface="PingFang SC"/>
+              </a:rPr>
+              <a:t>元数据</a:t>
+            </a:r>
+          </a:p>
+        </p:txBody>
+      </p:sp>
+      <p:sp>
+        <p:nvSpPr>
+          <p:cNvPr id="13" name="Rounded Rectangle 12"/>
+          <p:cNvSpPr/>
+          <p:nvPr/>
+        </p:nvSpPr>
+        <p:spPr>
+          <a:xfrm>
+            <a:off x="6362700" y="952500"/>
+            <a:ext cx="2076450" cy="1023937"/>
+          </a:xfrm>
+          <a:prstGeom prst="roundRect">
+            <a:avLst>
+              <a:gd name="adj" fmla="val 8000"/>
+            </a:avLst>
+          </a:prstGeom>
+          <a:solidFill>
+            <a:srgbClr val="FFFFFF"/>
+          </a:solidFill>
+          <a:ln w="12700">
+            <a:solidFill>
+              <a:srgbClr val="2563EB"/>
+            </a:solidFill>
+          </a:ln>
+          <a:effectLst/>
+        </p:spPr>
+        <p:style>
+          <a:lnRef idx="1">
+            <a:schemeClr val="accent1"/>
+          </a:lnRef>
+          <a:fillRef idx="3">
+            <a:schemeClr val="accent1"/>
+          </a:fillRef>
+          <a:effectRef idx="2">
+            <a:schemeClr val="accent1"/>
+          </a:effectRef>
+          <a:fontRef idx="minor">
+            <a:schemeClr val="lt1"/>
+          </a:fontRef>
+        </p:style>
+        <p:txBody>
+          <a:bodyPr rtlCol="0" anchor="ctr"/>
+          <a:lstStyle/>
+          <a:p>
+            <a:pPr algn="ctr"/>
+          </a:p>
+        </p:txBody>
+      </p:sp>
+      <p:sp>
+        <p:nvSpPr>
+          <p:cNvPr id="14" name="Rectangle 13"/>
+          <p:cNvSpPr/>
+          <p:nvPr/>
+        </p:nvSpPr>
+        <p:spPr>
+          <a:xfrm>
+            <a:off x="6362700" y="952500"/>
+            <a:ext cx="47625" cy="1023937"/>
+          </a:xfrm>
+          <a:prstGeom prst="rect">
+            <a:avLst/>
+          </a:prstGeom>
+          <a:solidFill>
+            <a:srgbClr val="2563EB"/>
+          </a:solidFill>
+          <a:ln>
+            <a:noFill/>
+          </a:ln>
+          <a:effectLst/>
+        </p:spPr>
+        <p:style>
+          <a:lnRef idx="1">
+            <a:schemeClr val="accent1"/>
+          </a:lnRef>
+          <a:fillRef idx="3">
+            <a:schemeClr val="accent1"/>
+          </a:fillRef>
+          <a:effectRef idx="2">
+            <a:schemeClr val="accent1"/>
+          </a:effectRef>
+          <a:fontRef idx="minor">
+            <a:schemeClr val="lt1"/>
+          </a:fontRef>
+        </p:style>
+        <p:txBody>
+          <a:bodyPr rtlCol="0" anchor="ctr"/>
+          <a:lstStyle/>
+          <a:p>
+            <a:pPr algn="ctr"/>
+          </a:p>
+        </p:txBody>
+      </p:sp>
+      <p:sp>
+        <p:nvSpPr>
+          <p:cNvPr id="15" name="TextBox 14"/>
+          <p:cNvSpPr txBox="1"/>
+          <p:nvPr/>
+        </p:nvSpPr>
+        <p:spPr>
+          <a:xfrm>
+            <a:off x="6515100" y="952500"/>
+            <a:ext cx="1809750" cy="1023937"/>
+          </a:xfrm>
+          <a:prstGeom prst="rect">
+            <a:avLst/>
+          </a:prstGeom>
+          <a:noFill/>
+        </p:spPr>
+        <p:txBody>
+          <a:bodyPr wrap="none" anchor="ctr">
+            <a:spAutoFit/>
+          </a:bodyPr>
+          <a:lstStyle/>
+          <a:p>
+            <a:pPr algn="l">
+              <a:lnSpc>
+                <a:spcPct val="115000"/>
+              </a:lnSpc>
+            </a:pPr>
+            <a:r>
+              <a:rPr sz="1300" b="1">
+                <a:solidFill>
+                  <a:srgbClr val="0B1D3A"/>
+                </a:solidFill>
+                <a:latin typeface="PingFang SC"/>
+              </a:rPr>
+              <a:t>版本</a:t>
+            </a:r>
+          </a:p>
+        </p:txBody>
+      </p:sp>
+      <p:sp>
+        <p:nvSpPr>
+          <p:cNvPr id="16" name="Rounded Rectangle 15"/>
+          <p:cNvSpPr/>
+          <p:nvPr/>
+        </p:nvSpPr>
+        <p:spPr>
+          <a:xfrm>
+            <a:off x="8591550" y="952500"/>
+            <a:ext cx="2076450" cy="1023937"/>
+          </a:xfrm>
+          <a:prstGeom prst="roundRect">
+            <a:avLst>
+              <a:gd name="adj" fmla="val 8000"/>
+            </a:avLst>
+          </a:prstGeom>
+          <a:solidFill>
+            <a:srgbClr val="FFFFFF"/>
+          </a:solidFill>
+          <a:ln w="12700">
+            <a:solidFill>
+              <a:srgbClr val="2563EB"/>
+            </a:solidFill>
+          </a:ln>
+          <a:effectLst/>
+        </p:spPr>
+        <p:style>
+          <a:lnRef idx="1">
+            <a:schemeClr val="accent1"/>
+          </a:lnRef>
+          <a:fillRef idx="3">
+            <a:schemeClr val="accent1"/>
+          </a:fillRef>
+          <a:effectRef idx="2">
+            <a:schemeClr val="accent1"/>
+          </a:effectRef>
+          <a:fontRef idx="minor">
+            <a:schemeClr val="lt1"/>
+          </a:fontRef>
+        </p:style>
+        <p:txBody>
+          <a:bodyPr rtlCol="0" anchor="ctr"/>
+          <a:lstStyle/>
+          <a:p>
+            <a:pPr algn="ctr"/>
+          </a:p>
+        </p:txBody>
+      </p:sp>
+      <p:sp>
+        <p:nvSpPr>
+          <p:cNvPr id="17" name="Rectangle 16"/>
+          <p:cNvSpPr/>
+          <p:nvPr/>
+        </p:nvSpPr>
+        <p:spPr>
+          <a:xfrm>
+            <a:off x="8591550" y="952500"/>
+            <a:ext cx="47625" cy="1023937"/>
+          </a:xfrm>
+          <a:prstGeom prst="rect">
+            <a:avLst/>
+          </a:prstGeom>
+          <a:solidFill>
+            <a:srgbClr val="2563EB"/>
+          </a:solidFill>
+          <a:ln>
+            <a:noFill/>
+          </a:ln>
+          <a:effectLst/>
+        </p:spPr>
+        <p:style>
+          <a:lnRef idx="1">
+            <a:schemeClr val="accent1"/>
+          </a:lnRef>
+          <a:fillRef idx="3">
+            <a:schemeClr val="accent1"/>
+          </a:fillRef>
+          <a:effectRef idx="2">
+            <a:schemeClr val="accent1"/>
+          </a:effectRef>
+          <a:fontRef idx="minor">
+            <a:schemeClr val="lt1"/>
+          </a:fontRef>
+        </p:style>
+        <p:txBody>
+          <a:bodyPr rtlCol="0" anchor="ctr"/>
+          <a:lstStyle/>
+          <a:p>
+            <a:pPr algn="ctr"/>
+          </a:p>
+        </p:txBody>
+      </p:sp>
+      <p:sp>
+        <p:nvSpPr>
+          <p:cNvPr id="18" name="TextBox 17"/>
+          <p:cNvSpPr txBox="1"/>
+          <p:nvPr/>
+        </p:nvSpPr>
+        <p:spPr>
+          <a:xfrm>
+            <a:off x="8743950" y="952500"/>
+            <a:ext cx="1809750" cy="1023937"/>
+          </a:xfrm>
+          <a:prstGeom prst="rect">
+            <a:avLst/>
+          </a:prstGeom>
+          <a:noFill/>
+        </p:spPr>
+        <p:txBody>
+          <a:bodyPr wrap="none" anchor="ctr">
+            <a:spAutoFit/>
+          </a:bodyPr>
+          <a:lstStyle/>
+          <a:p>
+            <a:pPr algn="l">
+              <a:lnSpc>
+                <a:spcPct val="115000"/>
+              </a:lnSpc>
+            </a:pPr>
+            <a:r>
+              <a:rPr sz="1300" b="1">
+                <a:solidFill>
+                  <a:srgbClr val="0B1D3A"/>
+                </a:solidFill>
+                <a:latin typeface="PingFang SC"/>
+              </a:rPr>
+              <a:t>启停</a:t>
+            </a:r>
+          </a:p>
+        </p:txBody>
+      </p:sp>
+      <p:cxnSp>
+        <p:nvCxnSpPr>
+          <p:cNvPr id="19" name="Connector 18"/>
+          <p:cNvCxnSpPr/>
+          <p:nvPr/>
+        </p:nvCxnSpPr>
+        <p:spPr>
+          <a:xfrm>
+            <a:off x="6096000" y="2033587"/>
+            <a:ext cx="0" cy="152400"/>
+          </a:xfrm>
+          <a:prstGeom prst="line">
+            <a:avLst/>
+          </a:prstGeom>
+          <a:ln w="17780">
+            <a:solidFill>
+              <a:srgbClr val="475569"/>
+            </a:solidFill>
+          </a:ln>
+        </p:spPr>
+        <p:style>
+          <a:lnRef idx="2">
+            <a:schemeClr val="accent1"/>
+          </a:lnRef>
+          <a:fillRef idx="0">
+            <a:schemeClr val="accent1"/>
+          </a:fillRef>
+          <a:effectRef idx="1">
+            <a:schemeClr val="accent1"/>
+          </a:effectRef>
+          <a:fontRef idx="minor">
+            <a:schemeClr val="tx1"/>
+          </a:fontRef>
+        </p:style>
+      </p:cxnSp>
+      <p:sp>
+        <p:nvSpPr>
+          <p:cNvPr id="20" name="Isosceles Triangle 19"/>
+          <p:cNvSpPr/>
+          <p:nvPr/>
+        </p:nvSpPr>
+        <p:spPr>
+          <a:xfrm rot="10800000">
+            <a:off x="6053138" y="2100263"/>
+            <a:ext cx="85725" cy="85725"/>
+          </a:xfrm>
+          <a:prstGeom prst="triangle">
+            <a:avLst/>
+          </a:prstGeom>
+          <a:solidFill>
+            <a:srgbClr val="475569"/>
+          </a:solidFill>
+          <a:ln>
+            <a:noFill/>
+          </a:ln>
+          <a:effectLst/>
+        </p:spPr>
+        <p:style>
+          <a:lnRef idx="1">
+            <a:schemeClr val="accent1"/>
+          </a:lnRef>
+          <a:fillRef idx="3">
+            <a:schemeClr val="accent1"/>
+          </a:fillRef>
+          <a:effectRef idx="2">
+            <a:schemeClr val="accent1"/>
+          </a:effectRef>
+          <a:fontRef idx="minor">
+            <a:schemeClr val="lt1"/>
+          </a:fontRef>
+        </p:style>
+        <p:txBody>
+          <a:bodyPr rtlCol="0" anchor="ctr"/>
+          <a:lstStyle/>
+          <a:p>
+            <a:pPr algn="ctr"/>
+          </a:p>
+        </p:txBody>
+      </p:sp>
+      <p:sp>
+        <p:nvSpPr>
+          <p:cNvPr id="21" name="Rounded Rectangle 20"/>
+          <p:cNvSpPr/>
+          <p:nvPr/>
+        </p:nvSpPr>
+        <p:spPr>
+          <a:xfrm>
+            <a:off x="5743575" y="2014537"/>
+            <a:ext cx="704850" cy="171450"/>
+          </a:xfrm>
+          <a:prstGeom prst="roundRect">
+            <a:avLst>
+              <a:gd name="adj" fmla="val 8000"/>
+            </a:avLst>
+          </a:prstGeom>
+          <a:solidFill>
+            <a:srgbClr val="FFFFFF"/>
+          </a:solidFill>
+          <a:ln w="12700">
+            <a:solidFill>
+              <a:srgbClr val="DDE5EE"/>
+            </a:solidFill>
+          </a:ln>
+          <a:effectLst/>
+        </p:spPr>
+        <p:style>
+          <a:lnRef idx="1">
+            <a:schemeClr val="accent1"/>
+          </a:lnRef>
+          <a:fillRef idx="3">
+            <a:schemeClr val="accent1"/>
+          </a:fillRef>
+          <a:effectRef idx="2">
+            <a:schemeClr val="accent1"/>
+          </a:effectRef>
+          <a:fontRef idx="minor">
+            <a:schemeClr val="lt1"/>
+          </a:fontRef>
+        </p:style>
+        <p:txBody>
+          <a:bodyPr rtlCol="0" anchor="ctr"/>
+          <a:lstStyle/>
+          <a:p>
+            <a:pPr algn="ctr"/>
+          </a:p>
+        </p:txBody>
+      </p:sp>
+      <p:sp>
+        <p:nvSpPr>
+          <p:cNvPr id="22" name="TextBox 21"/>
+          <p:cNvSpPr txBox="1"/>
+          <p:nvPr/>
+        </p:nvSpPr>
+        <p:spPr>
+          <a:xfrm>
+            <a:off x="5743575" y="2014537"/>
+            <a:ext cx="704850" cy="171450"/>
+          </a:xfrm>
+          <a:prstGeom prst="rect">
+            <a:avLst/>
+          </a:prstGeom>
+          <a:noFill/>
+        </p:spPr>
+        <p:txBody>
+          <a:bodyPr wrap="square" anchor="ctr">
+            <a:spAutoFit/>
+          </a:bodyPr>
+          <a:lstStyle/>
+          <a:p>
+            <a:pPr algn="ctr">
+              <a:lnSpc>
+                <a:spcPct val="100000"/>
+              </a:lnSpc>
+            </a:pPr>
+            <a:r>
+              <a:rPr sz="1100" b="1">
+                <a:solidFill>
+                  <a:srgbClr val="0B1D3A"/>
+                </a:solidFill>
+                <a:latin typeface="PingFang SC"/>
+              </a:rPr>
+              <a:t>注册</a:t>
+            </a:r>
+          </a:p>
+        </p:txBody>
+      </p:sp>
+      <p:sp>
+        <p:nvSpPr>
+          <p:cNvPr id="23" name="Rounded Rectangle 22"/>
+          <p:cNvSpPr/>
+          <p:nvPr/>
+        </p:nvSpPr>
+        <p:spPr>
+          <a:xfrm>
+            <a:off x="1847850" y="2185987"/>
+            <a:ext cx="8877300" cy="1100137"/>
+          </a:xfrm>
+          <a:prstGeom prst="roundRect">
+            <a:avLst>
+              <a:gd name="adj" fmla="val 8000"/>
+            </a:avLst>
+          </a:prstGeom>
+          <a:solidFill>
+            <a:srgbClr val="F1F5F9"/>
+          </a:solidFill>
+          <a:ln>
+            <a:noFill/>
+          </a:ln>
+          <a:effectLst/>
+        </p:spPr>
+        <p:style>
+          <a:lnRef idx="1">
+            <a:schemeClr val="accent1"/>
+          </a:lnRef>
+          <a:fillRef idx="3">
+            <a:schemeClr val="accent1"/>
+          </a:fillRef>
+          <a:effectRef idx="2">
+            <a:schemeClr val="accent1"/>
+          </a:effectRef>
+          <a:fontRef idx="minor">
+            <a:schemeClr val="lt1"/>
+          </a:fontRef>
+        </p:style>
+        <p:txBody>
+          <a:bodyPr rtlCol="0" anchor="ctr"/>
+          <a:lstStyle/>
+          <a:p>
+            <a:pPr algn="ctr"/>
+          </a:p>
+        </p:txBody>
+      </p:sp>
+      <p:sp>
+        <p:nvSpPr>
+          <p:cNvPr id="24" name="TextBox 23"/>
+          <p:cNvSpPr txBox="1"/>
+          <p:nvPr/>
+        </p:nvSpPr>
+        <p:spPr>
+          <a:xfrm>
+            <a:off x="1962150" y="1957387"/>
+            <a:ext cx="1905000" cy="209550"/>
           </a:xfrm>
           <a:prstGeom prst="rect">
             <a:avLst/>
@@ -27514,26 +27997,26 @@
               </a:lnSpc>
             </a:pPr>
             <a:r>
-              <a:rPr sz="1200" b="1">
+              <a:rPr sz="1100" b="1">
                 <a:solidFill>
-                  <a:srgbClr val="475569"/>
+                  <a:srgbClr val="14B8A6"/>
                 </a:solidFill>
                 <a:latin typeface="PingFang SC"/>
               </a:rPr>
-              <a:t>元数据</a:t>
-            </a:r>
-          </a:p>
-        </p:txBody>
-      </p:sp>
-      <p:sp>
-        <p:nvSpPr>
-          <p:cNvPr id="12" name="Rounded Rectangle 11"/>
-          <p:cNvSpPr/>
-          <p:nvPr/>
-        </p:nvSpPr>
-        <p:spPr>
-          <a:xfrm>
-            <a:off x="6362700" y="952500"/>
+              <a:t>L2</a:t>
+            </a:r>
+          </a:p>
+        </p:txBody>
+      </p:sp>
+      <p:sp>
+        <p:nvSpPr>
+          <p:cNvPr id="25" name="Rounded Rectangle 24"/>
+          <p:cNvSpPr/>
+          <p:nvPr/>
+        </p:nvSpPr>
+        <p:spPr>
+          <a:xfrm>
+            <a:off x="1905000" y="2224087"/>
             <a:ext cx="2076450" cy="1023937"/>
           </a:xfrm>
           <a:prstGeom prst="roundRect">
@@ -27546,7 +28029,7 @@
           </a:solidFill>
           <a:ln w="12700">
             <a:solidFill>
-              <a:srgbClr val="2563EB"/>
+              <a:srgbClr val="14B8A6"/>
             </a:solidFill>
           </a:ln>
           <a:effectLst/>
@@ -27575,20 +28058,20 @@
       </p:sp>
       <p:sp>
         <p:nvSpPr>
-          <p:cNvPr id="13" name="Rectangle 12"/>
-          <p:cNvSpPr/>
-          <p:nvPr/>
-        </p:nvSpPr>
-        <p:spPr>
-          <a:xfrm>
-            <a:off x="6362700" y="952500"/>
+          <p:cNvPr id="26" name="Rectangle 25"/>
+          <p:cNvSpPr/>
+          <p:nvPr/>
+        </p:nvSpPr>
+        <p:spPr>
+          <a:xfrm>
+            <a:off x="1905000" y="2224087"/>
             <a:ext cx="47625" cy="1023937"/>
           </a:xfrm>
           <a:prstGeom prst="rect">
             <a:avLst/>
           </a:prstGeom>
           <a:solidFill>
-            <a:srgbClr val="2563EB"/>
+            <a:srgbClr val="14B8A6"/>
           </a:solidFill>
           <a:ln>
             <a:noFill/>
@@ -27619,14 +28102,658 @@
       </p:sp>
       <p:sp>
         <p:nvSpPr>
-          <p:cNvPr id="14" name="TextBox 13"/>
+          <p:cNvPr id="27" name="TextBox 26"/>
           <p:cNvSpPr txBox="1"/>
           <p:nvPr/>
         </p:nvSpPr>
         <p:spPr>
           <a:xfrm>
-            <a:off x="6496050" y="952500"/>
-            <a:ext cx="1847850" cy="1023937"/>
+            <a:off x="2057400" y="2224087"/>
+            <a:ext cx="1809750" cy="1023937"/>
+          </a:xfrm>
+          <a:prstGeom prst="rect">
+            <a:avLst/>
+          </a:prstGeom>
+          <a:noFill/>
+        </p:spPr>
+        <p:txBody>
+          <a:bodyPr wrap="none" anchor="ctr">
+            <a:spAutoFit/>
+          </a:bodyPr>
+          <a:lstStyle/>
+          <a:p>
+            <a:pPr algn="l">
+              <a:lnSpc>
+                <a:spcPct val="115000"/>
+              </a:lnSpc>
+            </a:pPr>
+            <a:r>
+              <a:rPr sz="1300" b="1">
+                <a:solidFill>
+                  <a:srgbClr val="0B1D3A"/>
+                </a:solidFill>
+                <a:latin typeface="PingFang SC"/>
+              </a:rPr>
+              <a:t>执行:权限</a:t>
+            </a:r>
+          </a:p>
+        </p:txBody>
+      </p:sp>
+      <p:sp>
+        <p:nvSpPr>
+          <p:cNvPr id="28" name="Rounded Rectangle 27"/>
+          <p:cNvSpPr/>
+          <p:nvPr/>
+        </p:nvSpPr>
+        <p:spPr>
+          <a:xfrm>
+            <a:off x="4133850" y="2224087"/>
+            <a:ext cx="2076450" cy="1023937"/>
+          </a:xfrm>
+          <a:prstGeom prst="roundRect">
+            <a:avLst>
+              <a:gd name="adj" fmla="val 8000"/>
+            </a:avLst>
+          </a:prstGeom>
+          <a:solidFill>
+            <a:srgbClr val="FFFFFF"/>
+          </a:solidFill>
+          <a:ln w="12700">
+            <a:solidFill>
+              <a:srgbClr val="14B8A6"/>
+            </a:solidFill>
+          </a:ln>
+          <a:effectLst/>
+        </p:spPr>
+        <p:style>
+          <a:lnRef idx="1">
+            <a:schemeClr val="accent1"/>
+          </a:lnRef>
+          <a:fillRef idx="3">
+            <a:schemeClr val="accent1"/>
+          </a:fillRef>
+          <a:effectRef idx="2">
+            <a:schemeClr val="accent1"/>
+          </a:effectRef>
+          <a:fontRef idx="minor">
+            <a:schemeClr val="lt1"/>
+          </a:fontRef>
+        </p:style>
+        <p:txBody>
+          <a:bodyPr rtlCol="0" anchor="ctr"/>
+          <a:lstStyle/>
+          <a:p>
+            <a:pPr algn="ctr"/>
+          </a:p>
+        </p:txBody>
+      </p:sp>
+      <p:sp>
+        <p:nvSpPr>
+          <p:cNvPr id="29" name="Rectangle 28"/>
+          <p:cNvSpPr/>
+          <p:nvPr/>
+        </p:nvSpPr>
+        <p:spPr>
+          <a:xfrm>
+            <a:off x="4133850" y="2224087"/>
+            <a:ext cx="47625" cy="1023937"/>
+          </a:xfrm>
+          <a:prstGeom prst="rect">
+            <a:avLst/>
+          </a:prstGeom>
+          <a:solidFill>
+            <a:srgbClr val="14B8A6"/>
+          </a:solidFill>
+          <a:ln>
+            <a:noFill/>
+          </a:ln>
+          <a:effectLst/>
+        </p:spPr>
+        <p:style>
+          <a:lnRef idx="1">
+            <a:schemeClr val="accent1"/>
+          </a:lnRef>
+          <a:fillRef idx="3">
+            <a:schemeClr val="accent1"/>
+          </a:fillRef>
+          <a:effectRef idx="2">
+            <a:schemeClr val="accent1"/>
+          </a:effectRef>
+          <a:fontRef idx="minor">
+            <a:schemeClr val="lt1"/>
+          </a:fontRef>
+        </p:style>
+        <p:txBody>
+          <a:bodyPr rtlCol="0" anchor="ctr"/>
+          <a:lstStyle/>
+          <a:p>
+            <a:pPr algn="ctr"/>
+          </a:p>
+        </p:txBody>
+      </p:sp>
+      <p:sp>
+        <p:nvSpPr>
+          <p:cNvPr id="30" name="TextBox 29"/>
+          <p:cNvSpPr txBox="1"/>
+          <p:nvPr/>
+        </p:nvSpPr>
+        <p:spPr>
+          <a:xfrm>
+            <a:off x="4286250" y="2224087"/>
+            <a:ext cx="1809750" cy="1023937"/>
+          </a:xfrm>
+          <a:prstGeom prst="rect">
+            <a:avLst/>
+          </a:prstGeom>
+          <a:noFill/>
+        </p:spPr>
+        <p:txBody>
+          <a:bodyPr wrap="none" anchor="ctr">
+            <a:spAutoFit/>
+          </a:bodyPr>
+          <a:lstStyle/>
+          <a:p>
+            <a:pPr algn="l">
+              <a:lnSpc>
+                <a:spcPct val="115000"/>
+              </a:lnSpc>
+            </a:pPr>
+            <a:r>
+              <a:rPr sz="1300" b="1">
+                <a:solidFill>
+                  <a:srgbClr val="0B1D3A"/>
+                </a:solidFill>
+                <a:latin typeface="PingFang SC"/>
+              </a:rPr>
+              <a:t>Schema 校验</a:t>
+            </a:r>
+          </a:p>
+        </p:txBody>
+      </p:sp>
+      <p:sp>
+        <p:nvSpPr>
+          <p:cNvPr id="31" name="Rounded Rectangle 30"/>
+          <p:cNvSpPr/>
+          <p:nvPr/>
+        </p:nvSpPr>
+        <p:spPr>
+          <a:xfrm>
+            <a:off x="6362700" y="2224087"/>
+            <a:ext cx="2076450" cy="1023937"/>
+          </a:xfrm>
+          <a:prstGeom prst="roundRect">
+            <a:avLst>
+              <a:gd name="adj" fmla="val 8000"/>
+            </a:avLst>
+          </a:prstGeom>
+          <a:solidFill>
+            <a:srgbClr val="FFFFFF"/>
+          </a:solidFill>
+          <a:ln w="12700">
+            <a:solidFill>
+              <a:srgbClr val="14B8A6"/>
+            </a:solidFill>
+          </a:ln>
+          <a:effectLst/>
+        </p:spPr>
+        <p:style>
+          <a:lnRef idx="1">
+            <a:schemeClr val="accent1"/>
+          </a:lnRef>
+          <a:fillRef idx="3">
+            <a:schemeClr val="accent1"/>
+          </a:fillRef>
+          <a:effectRef idx="2">
+            <a:schemeClr val="accent1"/>
+          </a:effectRef>
+          <a:fontRef idx="minor">
+            <a:schemeClr val="lt1"/>
+          </a:fontRef>
+        </p:style>
+        <p:txBody>
+          <a:bodyPr rtlCol="0" anchor="ctr"/>
+          <a:lstStyle/>
+          <a:p>
+            <a:pPr algn="ctr"/>
+          </a:p>
+        </p:txBody>
+      </p:sp>
+      <p:sp>
+        <p:nvSpPr>
+          <p:cNvPr id="32" name="Rectangle 31"/>
+          <p:cNvSpPr/>
+          <p:nvPr/>
+        </p:nvSpPr>
+        <p:spPr>
+          <a:xfrm>
+            <a:off x="6362700" y="2224087"/>
+            <a:ext cx="47625" cy="1023937"/>
+          </a:xfrm>
+          <a:prstGeom prst="rect">
+            <a:avLst/>
+          </a:prstGeom>
+          <a:solidFill>
+            <a:srgbClr val="14B8A6"/>
+          </a:solidFill>
+          <a:ln>
+            <a:noFill/>
+          </a:ln>
+          <a:effectLst/>
+        </p:spPr>
+        <p:style>
+          <a:lnRef idx="1">
+            <a:schemeClr val="accent1"/>
+          </a:lnRef>
+          <a:fillRef idx="3">
+            <a:schemeClr val="accent1"/>
+          </a:fillRef>
+          <a:effectRef idx="2">
+            <a:schemeClr val="accent1"/>
+          </a:effectRef>
+          <a:fontRef idx="minor">
+            <a:schemeClr val="lt1"/>
+          </a:fontRef>
+        </p:style>
+        <p:txBody>
+          <a:bodyPr rtlCol="0" anchor="ctr"/>
+          <a:lstStyle/>
+          <a:p>
+            <a:pPr algn="ctr"/>
+          </a:p>
+        </p:txBody>
+      </p:sp>
+      <p:sp>
+        <p:nvSpPr>
+          <p:cNvPr id="33" name="TextBox 32"/>
+          <p:cNvSpPr txBox="1"/>
+          <p:nvPr/>
+        </p:nvSpPr>
+        <p:spPr>
+          <a:xfrm>
+            <a:off x="6515100" y="2224087"/>
+            <a:ext cx="1809750" cy="1023937"/>
+          </a:xfrm>
+          <a:prstGeom prst="rect">
+            <a:avLst/>
+          </a:prstGeom>
+          <a:noFill/>
+        </p:spPr>
+        <p:txBody>
+          <a:bodyPr wrap="none" anchor="ctr">
+            <a:spAutoFit/>
+          </a:bodyPr>
+          <a:lstStyle/>
+          <a:p>
+            <a:pPr algn="l">
+              <a:lnSpc>
+                <a:spcPct val="115000"/>
+              </a:lnSpc>
+            </a:pPr>
+            <a:r>
+              <a:rPr sz="1300" b="1">
+                <a:solidFill>
+                  <a:srgbClr val="0B1D3A"/>
+                </a:solidFill>
+                <a:latin typeface="PingFang SC"/>
+              </a:rPr>
+              <a:t>超时</a:t>
+            </a:r>
+          </a:p>
+        </p:txBody>
+      </p:sp>
+      <p:sp>
+        <p:nvSpPr>
+          <p:cNvPr id="34" name="Rounded Rectangle 33"/>
+          <p:cNvSpPr/>
+          <p:nvPr/>
+        </p:nvSpPr>
+        <p:spPr>
+          <a:xfrm>
+            <a:off x="8591550" y="2224087"/>
+            <a:ext cx="2076450" cy="1023937"/>
+          </a:xfrm>
+          <a:prstGeom prst="roundRect">
+            <a:avLst>
+              <a:gd name="adj" fmla="val 8000"/>
+            </a:avLst>
+          </a:prstGeom>
+          <a:solidFill>
+            <a:srgbClr val="FFFFFF"/>
+          </a:solidFill>
+          <a:ln w="12700">
+            <a:solidFill>
+              <a:srgbClr val="14B8A6"/>
+            </a:solidFill>
+          </a:ln>
+          <a:effectLst/>
+        </p:spPr>
+        <p:style>
+          <a:lnRef idx="1">
+            <a:schemeClr val="accent1"/>
+          </a:lnRef>
+          <a:fillRef idx="3">
+            <a:schemeClr val="accent1"/>
+          </a:fillRef>
+          <a:effectRef idx="2">
+            <a:schemeClr val="accent1"/>
+          </a:effectRef>
+          <a:fontRef idx="minor">
+            <a:schemeClr val="lt1"/>
+          </a:fontRef>
+        </p:style>
+        <p:txBody>
+          <a:bodyPr rtlCol="0" anchor="ctr"/>
+          <a:lstStyle/>
+          <a:p>
+            <a:pPr algn="ctr"/>
+          </a:p>
+        </p:txBody>
+      </p:sp>
+      <p:sp>
+        <p:nvSpPr>
+          <p:cNvPr id="35" name="Rectangle 34"/>
+          <p:cNvSpPr/>
+          <p:nvPr/>
+        </p:nvSpPr>
+        <p:spPr>
+          <a:xfrm>
+            <a:off x="8591550" y="2224087"/>
+            <a:ext cx="47625" cy="1023937"/>
+          </a:xfrm>
+          <a:prstGeom prst="rect">
+            <a:avLst/>
+          </a:prstGeom>
+          <a:solidFill>
+            <a:srgbClr val="14B8A6"/>
+          </a:solidFill>
+          <a:ln>
+            <a:noFill/>
+          </a:ln>
+          <a:effectLst/>
+        </p:spPr>
+        <p:style>
+          <a:lnRef idx="1">
+            <a:schemeClr val="accent1"/>
+          </a:lnRef>
+          <a:fillRef idx="3">
+            <a:schemeClr val="accent1"/>
+          </a:fillRef>
+          <a:effectRef idx="2">
+            <a:schemeClr val="accent1"/>
+          </a:effectRef>
+          <a:fontRef idx="minor">
+            <a:schemeClr val="lt1"/>
+          </a:fontRef>
+        </p:style>
+        <p:txBody>
+          <a:bodyPr rtlCol="0" anchor="ctr"/>
+          <a:lstStyle/>
+          <a:p>
+            <a:pPr algn="ctr"/>
+          </a:p>
+        </p:txBody>
+      </p:sp>
+      <p:sp>
+        <p:nvSpPr>
+          <p:cNvPr id="36" name="TextBox 35"/>
+          <p:cNvSpPr txBox="1"/>
+          <p:nvPr/>
+        </p:nvSpPr>
+        <p:spPr>
+          <a:xfrm>
+            <a:off x="8743950" y="2224087"/>
+            <a:ext cx="1809750" cy="1023937"/>
+          </a:xfrm>
+          <a:prstGeom prst="rect">
+            <a:avLst/>
+          </a:prstGeom>
+          <a:noFill/>
+        </p:spPr>
+        <p:txBody>
+          <a:bodyPr wrap="none" anchor="ctr">
+            <a:spAutoFit/>
+          </a:bodyPr>
+          <a:lstStyle/>
+          <a:p>
+            <a:pPr algn="l">
+              <a:lnSpc>
+                <a:spcPct val="115000"/>
+              </a:lnSpc>
+            </a:pPr>
+            <a:r>
+              <a:rPr sz="1300" b="1">
+                <a:solidFill>
+                  <a:srgbClr val="0B1D3A"/>
+                </a:solidFill>
+                <a:latin typeface="PingFang SC"/>
+              </a:rPr>
+              <a:t>重试</a:t>
+            </a:r>
+          </a:p>
+        </p:txBody>
+      </p:sp>
+      <p:cxnSp>
+        <p:nvCxnSpPr>
+          <p:cNvPr id="37" name="Connector 36"/>
+          <p:cNvCxnSpPr/>
+          <p:nvPr/>
+        </p:nvCxnSpPr>
+        <p:spPr>
+          <a:xfrm>
+            <a:off x="6096000" y="3305174"/>
+            <a:ext cx="0" cy="152400"/>
+          </a:xfrm>
+          <a:prstGeom prst="line">
+            <a:avLst/>
+          </a:prstGeom>
+          <a:ln w="17780">
+            <a:solidFill>
+              <a:srgbClr val="475569"/>
+            </a:solidFill>
+          </a:ln>
+        </p:spPr>
+        <p:style>
+          <a:lnRef idx="2">
+            <a:schemeClr val="accent1"/>
+          </a:lnRef>
+          <a:fillRef idx="0">
+            <a:schemeClr val="accent1"/>
+          </a:fillRef>
+          <a:effectRef idx="1">
+            <a:schemeClr val="accent1"/>
+          </a:effectRef>
+          <a:fontRef idx="minor">
+            <a:schemeClr val="tx1"/>
+          </a:fontRef>
+        </p:style>
+      </p:cxnSp>
+      <p:sp>
+        <p:nvSpPr>
+          <p:cNvPr id="38" name="Isosceles Triangle 37"/>
+          <p:cNvSpPr/>
+          <p:nvPr/>
+        </p:nvSpPr>
+        <p:spPr>
+          <a:xfrm rot="10800000">
+            <a:off x="6053138" y="3371850"/>
+            <a:ext cx="85725" cy="85725"/>
+          </a:xfrm>
+          <a:prstGeom prst="triangle">
+            <a:avLst/>
+          </a:prstGeom>
+          <a:solidFill>
+            <a:srgbClr val="475569"/>
+          </a:solidFill>
+          <a:ln>
+            <a:noFill/>
+          </a:ln>
+          <a:effectLst/>
+        </p:spPr>
+        <p:style>
+          <a:lnRef idx="1">
+            <a:schemeClr val="accent1"/>
+          </a:lnRef>
+          <a:fillRef idx="3">
+            <a:schemeClr val="accent1"/>
+          </a:fillRef>
+          <a:effectRef idx="2">
+            <a:schemeClr val="accent1"/>
+          </a:effectRef>
+          <a:fontRef idx="minor">
+            <a:schemeClr val="lt1"/>
+          </a:fontRef>
+        </p:style>
+        <p:txBody>
+          <a:bodyPr rtlCol="0" anchor="ctr"/>
+          <a:lstStyle/>
+          <a:p>
+            <a:pPr algn="ctr"/>
+          </a:p>
+        </p:txBody>
+      </p:sp>
+      <p:sp>
+        <p:nvSpPr>
+          <p:cNvPr id="39" name="Rounded Rectangle 38"/>
+          <p:cNvSpPr/>
+          <p:nvPr/>
+        </p:nvSpPr>
+        <p:spPr>
+          <a:xfrm>
+            <a:off x="5743575" y="3286124"/>
+            <a:ext cx="704850" cy="171450"/>
+          </a:xfrm>
+          <a:prstGeom prst="roundRect">
+            <a:avLst>
+              <a:gd name="adj" fmla="val 8000"/>
+            </a:avLst>
+          </a:prstGeom>
+          <a:solidFill>
+            <a:srgbClr val="FFFFFF"/>
+          </a:solidFill>
+          <a:ln w="12700">
+            <a:solidFill>
+              <a:srgbClr val="DDE5EE"/>
+            </a:solidFill>
+          </a:ln>
+          <a:effectLst/>
+        </p:spPr>
+        <p:style>
+          <a:lnRef idx="1">
+            <a:schemeClr val="accent1"/>
+          </a:lnRef>
+          <a:fillRef idx="3">
+            <a:schemeClr val="accent1"/>
+          </a:fillRef>
+          <a:effectRef idx="2">
+            <a:schemeClr val="accent1"/>
+          </a:effectRef>
+          <a:fontRef idx="minor">
+            <a:schemeClr val="lt1"/>
+          </a:fontRef>
+        </p:style>
+        <p:txBody>
+          <a:bodyPr rtlCol="0" anchor="ctr"/>
+          <a:lstStyle/>
+          <a:p>
+            <a:pPr algn="ctr"/>
+          </a:p>
+        </p:txBody>
+      </p:sp>
+      <p:sp>
+        <p:nvSpPr>
+          <p:cNvPr id="40" name="TextBox 39"/>
+          <p:cNvSpPr txBox="1"/>
+          <p:nvPr/>
+        </p:nvSpPr>
+        <p:spPr>
+          <a:xfrm>
+            <a:off x="5743575" y="3286124"/>
+            <a:ext cx="704850" cy="171450"/>
+          </a:xfrm>
+          <a:prstGeom prst="rect">
+            <a:avLst/>
+          </a:prstGeom>
+          <a:noFill/>
+        </p:spPr>
+        <p:txBody>
+          <a:bodyPr wrap="square" anchor="ctr">
+            <a:spAutoFit/>
+          </a:bodyPr>
+          <a:lstStyle/>
+          <a:p>
+            <a:pPr algn="ctr">
+              <a:lnSpc>
+                <a:spcPct val="100000"/>
+              </a:lnSpc>
+            </a:pPr>
+            <a:r>
+              <a:rPr sz="1100" b="1">
+                <a:solidFill>
+                  <a:srgbClr val="0B1D3A"/>
+                </a:solidFill>
+                <a:latin typeface="PingFang SC"/>
+              </a:rPr>
+              <a:t>治理</a:t>
+            </a:r>
+          </a:p>
+        </p:txBody>
+      </p:sp>
+      <p:sp>
+        <p:nvSpPr>
+          <p:cNvPr id="41" name="Rounded Rectangle 40"/>
+          <p:cNvSpPr/>
+          <p:nvPr/>
+        </p:nvSpPr>
+        <p:spPr>
+          <a:xfrm>
+            <a:off x="1847850" y="3457574"/>
+            <a:ext cx="8877300" cy="1100137"/>
+          </a:xfrm>
+          <a:prstGeom prst="roundRect">
+            <a:avLst>
+              <a:gd name="adj" fmla="val 8000"/>
+            </a:avLst>
+          </a:prstGeom>
+          <a:solidFill>
+            <a:srgbClr val="F1F5F9"/>
+          </a:solidFill>
+          <a:ln>
+            <a:noFill/>
+          </a:ln>
+          <a:effectLst/>
+        </p:spPr>
+        <p:style>
+          <a:lnRef idx="1">
+            <a:schemeClr val="accent1"/>
+          </a:lnRef>
+          <a:fillRef idx="3">
+            <a:schemeClr val="accent1"/>
+          </a:fillRef>
+          <a:effectRef idx="2">
+            <a:schemeClr val="accent1"/>
+          </a:effectRef>
+          <a:fontRef idx="minor">
+            <a:schemeClr val="lt1"/>
+          </a:fontRef>
+        </p:style>
+        <p:txBody>
+          <a:bodyPr rtlCol="0" anchor="ctr"/>
+          <a:lstStyle/>
+          <a:p>
+            <a:pPr algn="ctr"/>
+          </a:p>
+        </p:txBody>
+      </p:sp>
+      <p:sp>
+        <p:nvSpPr>
+          <p:cNvPr id="42" name="TextBox 41"/>
+          <p:cNvSpPr txBox="1"/>
+          <p:nvPr/>
+        </p:nvSpPr>
+        <p:spPr>
+          <a:xfrm>
+            <a:off x="1962150" y="3228974"/>
+            <a:ext cx="1905000" cy="209550"/>
           </a:xfrm>
           <a:prstGeom prst="rect">
             <a:avLst/>
@@ -27645,27 +28772,27 @@
               </a:lnSpc>
             </a:pPr>
             <a:r>
-              <a:rPr sz="1200" b="1">
+              <a:rPr sz="1100" b="1">
                 <a:solidFill>
-                  <a:srgbClr val="475569"/>
+                  <a:srgbClr val="8B5CF6"/>
                 </a:solidFill>
                 <a:latin typeface="PingFang SC"/>
               </a:rPr>
-              <a:t>版本</a:t>
-            </a:r>
-          </a:p>
-        </p:txBody>
-      </p:sp>
-      <p:sp>
-        <p:nvSpPr>
-          <p:cNvPr id="15" name="Rounded Rectangle 14"/>
-          <p:cNvSpPr/>
-          <p:nvPr/>
-        </p:nvSpPr>
-        <p:spPr>
-          <a:xfrm>
-            <a:off x="8591550" y="952500"/>
-            <a:ext cx="2076450" cy="1023937"/>
+              <a:t>L3</a:t>
+            </a:r>
+          </a:p>
+        </p:txBody>
+      </p:sp>
+      <p:sp>
+        <p:nvSpPr>
+          <p:cNvPr id="43" name="Rounded Rectangle 42"/>
+          <p:cNvSpPr/>
+          <p:nvPr/>
+        </p:nvSpPr>
+        <p:spPr>
+          <a:xfrm>
+            <a:off x="1905000" y="3495674"/>
+            <a:ext cx="2819400" cy="1023937"/>
           </a:xfrm>
           <a:prstGeom prst="roundRect">
             <a:avLst>
@@ -27677,7 +28804,7 @@
           </a:solidFill>
           <a:ln w="12700">
             <a:solidFill>
-              <a:srgbClr val="2563EB"/>
+              <a:srgbClr val="8B5CF6"/>
             </a:solidFill>
           </a:ln>
           <a:effectLst/>
@@ -27706,20 +28833,20 @@
       </p:sp>
       <p:sp>
         <p:nvSpPr>
-          <p:cNvPr id="16" name="Rectangle 15"/>
-          <p:cNvSpPr/>
-          <p:nvPr/>
-        </p:nvSpPr>
-        <p:spPr>
-          <a:xfrm>
-            <a:off x="8591550" y="952500"/>
+          <p:cNvPr id="44" name="Rectangle 43"/>
+          <p:cNvSpPr/>
+          <p:nvPr/>
+        </p:nvSpPr>
+        <p:spPr>
+          <a:xfrm>
+            <a:off x="1905000" y="3495674"/>
             <a:ext cx="47625" cy="1023937"/>
           </a:xfrm>
           <a:prstGeom prst="rect">
             <a:avLst/>
           </a:prstGeom>
           <a:solidFill>
-            <a:srgbClr val="2563EB"/>
+            <a:srgbClr val="8B5CF6"/>
           </a:solidFill>
           <a:ln>
             <a:noFill/>
@@ -27750,14 +28877,527 @@
       </p:sp>
       <p:sp>
         <p:nvSpPr>
-          <p:cNvPr id="17" name="TextBox 16"/>
+          <p:cNvPr id="45" name="TextBox 44"/>
           <p:cNvSpPr txBox="1"/>
           <p:nvPr/>
         </p:nvSpPr>
         <p:spPr>
           <a:xfrm>
-            <a:off x="8724900" y="952500"/>
-            <a:ext cx="1847850" cy="1023937"/>
+            <a:off x="2057400" y="3495674"/>
+            <a:ext cx="2552700" cy="1023937"/>
+          </a:xfrm>
+          <a:prstGeom prst="rect">
+            <a:avLst/>
+          </a:prstGeom>
+          <a:noFill/>
+        </p:spPr>
+        <p:txBody>
+          <a:bodyPr wrap="none" anchor="ctr">
+            <a:spAutoFit/>
+          </a:bodyPr>
+          <a:lstStyle/>
+          <a:p>
+            <a:pPr algn="l">
+              <a:lnSpc>
+                <a:spcPct val="115000"/>
+              </a:lnSpc>
+            </a:pPr>
+            <a:r>
+              <a:rPr sz="1300" b="1">
+                <a:solidFill>
+                  <a:srgbClr val="0B1D3A"/>
+                </a:solidFill>
+                <a:latin typeface="PingFang SC"/>
+              </a:rPr>
+              <a:t>审计:InMemory</a:t>
+            </a:r>
+          </a:p>
+        </p:txBody>
+      </p:sp>
+      <p:sp>
+        <p:nvSpPr>
+          <p:cNvPr id="46" name="Rounded Rectangle 45"/>
+          <p:cNvSpPr/>
+          <p:nvPr/>
+        </p:nvSpPr>
+        <p:spPr>
+          <a:xfrm>
+            <a:off x="4876800" y="3495674"/>
+            <a:ext cx="2819400" cy="1023937"/>
+          </a:xfrm>
+          <a:prstGeom prst="roundRect">
+            <a:avLst>
+              <a:gd name="adj" fmla="val 8000"/>
+            </a:avLst>
+          </a:prstGeom>
+          <a:solidFill>
+            <a:srgbClr val="FFFFFF"/>
+          </a:solidFill>
+          <a:ln w="12700">
+            <a:solidFill>
+              <a:srgbClr val="8B5CF6"/>
+            </a:solidFill>
+          </a:ln>
+          <a:effectLst/>
+        </p:spPr>
+        <p:style>
+          <a:lnRef idx="1">
+            <a:schemeClr val="accent1"/>
+          </a:lnRef>
+          <a:fillRef idx="3">
+            <a:schemeClr val="accent1"/>
+          </a:fillRef>
+          <a:effectRef idx="2">
+            <a:schemeClr val="accent1"/>
+          </a:effectRef>
+          <a:fontRef idx="minor">
+            <a:schemeClr val="lt1"/>
+          </a:fontRef>
+        </p:style>
+        <p:txBody>
+          <a:bodyPr rtlCol="0" anchor="ctr"/>
+          <a:lstStyle/>
+          <a:p>
+            <a:pPr algn="ctr"/>
+          </a:p>
+        </p:txBody>
+      </p:sp>
+      <p:sp>
+        <p:nvSpPr>
+          <p:cNvPr id="47" name="Rectangle 46"/>
+          <p:cNvSpPr/>
+          <p:nvPr/>
+        </p:nvSpPr>
+        <p:spPr>
+          <a:xfrm>
+            <a:off x="4876800" y="3495674"/>
+            <a:ext cx="47625" cy="1023937"/>
+          </a:xfrm>
+          <a:prstGeom prst="rect">
+            <a:avLst/>
+          </a:prstGeom>
+          <a:solidFill>
+            <a:srgbClr val="8B5CF6"/>
+          </a:solidFill>
+          <a:ln>
+            <a:noFill/>
+          </a:ln>
+          <a:effectLst/>
+        </p:spPr>
+        <p:style>
+          <a:lnRef idx="1">
+            <a:schemeClr val="accent1"/>
+          </a:lnRef>
+          <a:fillRef idx="3">
+            <a:schemeClr val="accent1"/>
+          </a:fillRef>
+          <a:effectRef idx="2">
+            <a:schemeClr val="accent1"/>
+          </a:effectRef>
+          <a:fontRef idx="minor">
+            <a:schemeClr val="lt1"/>
+          </a:fontRef>
+        </p:style>
+        <p:txBody>
+          <a:bodyPr rtlCol="0" anchor="ctr"/>
+          <a:lstStyle/>
+          <a:p>
+            <a:pPr algn="ctr"/>
+          </a:p>
+        </p:txBody>
+      </p:sp>
+      <p:sp>
+        <p:nvSpPr>
+          <p:cNvPr id="48" name="TextBox 47"/>
+          <p:cNvSpPr txBox="1"/>
+          <p:nvPr/>
+        </p:nvSpPr>
+        <p:spPr>
+          <a:xfrm>
+            <a:off x="5029200" y="3495674"/>
+            <a:ext cx="2552700" cy="1023937"/>
+          </a:xfrm>
+          <a:prstGeom prst="rect">
+            <a:avLst/>
+          </a:prstGeom>
+          <a:noFill/>
+        </p:spPr>
+        <p:txBody>
+          <a:bodyPr wrap="none" anchor="ctr">
+            <a:spAutoFit/>
+          </a:bodyPr>
+          <a:lstStyle/>
+          <a:p>
+            <a:pPr algn="l">
+              <a:lnSpc>
+                <a:spcPct val="115000"/>
+              </a:lnSpc>
+            </a:pPr>
+            <a:r>
+              <a:rPr sz="1100" b="1">
+                <a:solidFill>
+                  <a:srgbClr val="0B1D3A"/>
+                </a:solidFill>
+                <a:latin typeface="PingFang SC"/>
+              </a:rPr>
+              <a:t>Pulsar 适配(降级)</a:t>
+            </a:r>
+          </a:p>
+        </p:txBody>
+      </p:sp>
+      <p:sp>
+        <p:nvSpPr>
+          <p:cNvPr id="49" name="Rounded Rectangle 48"/>
+          <p:cNvSpPr/>
+          <p:nvPr/>
+        </p:nvSpPr>
+        <p:spPr>
+          <a:xfrm>
+            <a:off x="7848600" y="3495674"/>
+            <a:ext cx="2819400" cy="1023937"/>
+          </a:xfrm>
+          <a:prstGeom prst="roundRect">
+            <a:avLst>
+              <a:gd name="adj" fmla="val 8000"/>
+            </a:avLst>
+          </a:prstGeom>
+          <a:solidFill>
+            <a:srgbClr val="FFFFFF"/>
+          </a:solidFill>
+          <a:ln w="12700">
+            <a:solidFill>
+              <a:srgbClr val="8B5CF6"/>
+            </a:solidFill>
+          </a:ln>
+          <a:effectLst/>
+        </p:spPr>
+        <p:style>
+          <a:lnRef idx="1">
+            <a:schemeClr val="accent1"/>
+          </a:lnRef>
+          <a:fillRef idx="3">
+            <a:schemeClr val="accent1"/>
+          </a:fillRef>
+          <a:effectRef idx="2">
+            <a:schemeClr val="accent1"/>
+          </a:effectRef>
+          <a:fontRef idx="minor">
+            <a:schemeClr val="lt1"/>
+          </a:fontRef>
+        </p:style>
+        <p:txBody>
+          <a:bodyPr rtlCol="0" anchor="ctr"/>
+          <a:lstStyle/>
+          <a:p>
+            <a:pPr algn="ctr"/>
+          </a:p>
+        </p:txBody>
+      </p:sp>
+      <p:sp>
+        <p:nvSpPr>
+          <p:cNvPr id="50" name="Rectangle 49"/>
+          <p:cNvSpPr/>
+          <p:nvPr/>
+        </p:nvSpPr>
+        <p:spPr>
+          <a:xfrm>
+            <a:off x="7848600" y="3495674"/>
+            <a:ext cx="47625" cy="1023937"/>
+          </a:xfrm>
+          <a:prstGeom prst="rect">
+            <a:avLst/>
+          </a:prstGeom>
+          <a:solidFill>
+            <a:srgbClr val="8B5CF6"/>
+          </a:solidFill>
+          <a:ln>
+            <a:noFill/>
+          </a:ln>
+          <a:effectLst/>
+        </p:spPr>
+        <p:style>
+          <a:lnRef idx="1">
+            <a:schemeClr val="accent1"/>
+          </a:lnRef>
+          <a:fillRef idx="3">
+            <a:schemeClr val="accent1"/>
+          </a:fillRef>
+          <a:effectRef idx="2">
+            <a:schemeClr val="accent1"/>
+          </a:effectRef>
+          <a:fontRef idx="minor">
+            <a:schemeClr val="lt1"/>
+          </a:fontRef>
+        </p:style>
+        <p:txBody>
+          <a:bodyPr rtlCol="0" anchor="ctr"/>
+          <a:lstStyle/>
+          <a:p>
+            <a:pPr algn="ctr"/>
+          </a:p>
+        </p:txBody>
+      </p:sp>
+      <p:sp>
+        <p:nvSpPr>
+          <p:cNvPr id="51" name="TextBox 50"/>
+          <p:cNvSpPr txBox="1"/>
+          <p:nvPr/>
+        </p:nvSpPr>
+        <p:spPr>
+          <a:xfrm>
+            <a:off x="8001000" y="3495674"/>
+            <a:ext cx="2552700" cy="1023937"/>
+          </a:xfrm>
+          <a:prstGeom prst="rect">
+            <a:avLst/>
+          </a:prstGeom>
+          <a:noFill/>
+        </p:spPr>
+        <p:txBody>
+          <a:bodyPr wrap="none" anchor="ctr">
+            <a:spAutoFit/>
+          </a:bodyPr>
+          <a:lstStyle/>
+          <a:p>
+            <a:pPr algn="l">
+              <a:lnSpc>
+                <a:spcPct val="115000"/>
+              </a:lnSpc>
+            </a:pPr>
+            <a:r>
+              <a:rPr sz="1300" b="1">
+                <a:solidFill>
+                  <a:srgbClr val="0B1D3A"/>
+                </a:solidFill>
+                <a:latin typeface="PingFang SC"/>
+              </a:rPr>
+              <a:t>哈希链</a:t>
+            </a:r>
+          </a:p>
+        </p:txBody>
+      </p:sp>
+      <p:cxnSp>
+        <p:nvCxnSpPr>
+          <p:cNvPr id="52" name="Connector 51"/>
+          <p:cNvCxnSpPr/>
+          <p:nvPr/>
+        </p:nvCxnSpPr>
+        <p:spPr>
+          <a:xfrm>
+            <a:off x="6096000" y="4576761"/>
+            <a:ext cx="0" cy="152400"/>
+          </a:xfrm>
+          <a:prstGeom prst="line">
+            <a:avLst/>
+          </a:prstGeom>
+          <a:ln w="17780">
+            <a:solidFill>
+              <a:srgbClr val="475569"/>
+            </a:solidFill>
+          </a:ln>
+        </p:spPr>
+        <p:style>
+          <a:lnRef idx="2">
+            <a:schemeClr val="accent1"/>
+          </a:lnRef>
+          <a:fillRef idx="0">
+            <a:schemeClr val="accent1"/>
+          </a:fillRef>
+          <a:effectRef idx="1">
+            <a:schemeClr val="accent1"/>
+          </a:effectRef>
+          <a:fontRef idx="minor">
+            <a:schemeClr val="tx1"/>
+          </a:fontRef>
+        </p:style>
+      </p:cxnSp>
+      <p:sp>
+        <p:nvSpPr>
+          <p:cNvPr id="53" name="Isosceles Triangle 52"/>
+          <p:cNvSpPr/>
+          <p:nvPr/>
+        </p:nvSpPr>
+        <p:spPr>
+          <a:xfrm rot="10800000">
+            <a:off x="6053138" y="4643437"/>
+            <a:ext cx="85725" cy="85725"/>
+          </a:xfrm>
+          <a:prstGeom prst="triangle">
+            <a:avLst/>
+          </a:prstGeom>
+          <a:solidFill>
+            <a:srgbClr val="475569"/>
+          </a:solidFill>
+          <a:ln>
+            <a:noFill/>
+          </a:ln>
+          <a:effectLst/>
+        </p:spPr>
+        <p:style>
+          <a:lnRef idx="1">
+            <a:schemeClr val="accent1"/>
+          </a:lnRef>
+          <a:fillRef idx="3">
+            <a:schemeClr val="accent1"/>
+          </a:fillRef>
+          <a:effectRef idx="2">
+            <a:schemeClr val="accent1"/>
+          </a:effectRef>
+          <a:fontRef idx="minor">
+            <a:schemeClr val="lt1"/>
+          </a:fontRef>
+        </p:style>
+        <p:txBody>
+          <a:bodyPr rtlCol="0" anchor="ctr"/>
+          <a:lstStyle/>
+          <a:p>
+            <a:pPr algn="ctr"/>
+          </a:p>
+        </p:txBody>
+      </p:sp>
+      <p:sp>
+        <p:nvSpPr>
+          <p:cNvPr id="54" name="Rounded Rectangle 53"/>
+          <p:cNvSpPr/>
+          <p:nvPr/>
+        </p:nvSpPr>
+        <p:spPr>
+          <a:xfrm>
+            <a:off x="5743575" y="4557711"/>
+            <a:ext cx="704850" cy="171450"/>
+          </a:xfrm>
+          <a:prstGeom prst="roundRect">
+            <a:avLst>
+              <a:gd name="adj" fmla="val 8000"/>
+            </a:avLst>
+          </a:prstGeom>
+          <a:solidFill>
+            <a:srgbClr val="FFFFFF"/>
+          </a:solidFill>
+          <a:ln w="12700">
+            <a:solidFill>
+              <a:srgbClr val="DDE5EE"/>
+            </a:solidFill>
+          </a:ln>
+          <a:effectLst/>
+        </p:spPr>
+        <p:style>
+          <a:lnRef idx="1">
+            <a:schemeClr val="accent1"/>
+          </a:lnRef>
+          <a:fillRef idx="3">
+            <a:schemeClr val="accent1"/>
+          </a:fillRef>
+          <a:effectRef idx="2">
+            <a:schemeClr val="accent1"/>
+          </a:effectRef>
+          <a:fontRef idx="minor">
+            <a:schemeClr val="lt1"/>
+          </a:fontRef>
+        </p:style>
+        <p:txBody>
+          <a:bodyPr rtlCol="0" anchor="ctr"/>
+          <a:lstStyle/>
+          <a:p>
+            <a:pPr algn="ctr"/>
+          </a:p>
+        </p:txBody>
+      </p:sp>
+      <p:sp>
+        <p:nvSpPr>
+          <p:cNvPr id="55" name="TextBox 54"/>
+          <p:cNvSpPr txBox="1"/>
+          <p:nvPr/>
+        </p:nvSpPr>
+        <p:spPr>
+          <a:xfrm>
+            <a:off x="5743575" y="4557711"/>
+            <a:ext cx="704850" cy="171450"/>
+          </a:xfrm>
+          <a:prstGeom prst="rect">
+            <a:avLst/>
+          </a:prstGeom>
+          <a:noFill/>
+        </p:spPr>
+        <p:txBody>
+          <a:bodyPr wrap="square" anchor="ctr">
+            <a:spAutoFit/>
+          </a:bodyPr>
+          <a:lstStyle/>
+          <a:p>
+            <a:pPr algn="ctr">
+              <a:lnSpc>
+                <a:spcPct val="100000"/>
+              </a:lnSpc>
+            </a:pPr>
+            <a:r>
+              <a:rPr sz="1100" b="1">
+                <a:solidFill>
+                  <a:srgbClr val="0B1D3A"/>
+                </a:solidFill>
+                <a:latin typeface="PingFang SC"/>
+              </a:rPr>
+              <a:t>审计</a:t>
+            </a:r>
+          </a:p>
+        </p:txBody>
+      </p:sp>
+      <p:sp>
+        <p:nvSpPr>
+          <p:cNvPr id="56" name="Rounded Rectangle 55"/>
+          <p:cNvSpPr/>
+          <p:nvPr/>
+        </p:nvSpPr>
+        <p:spPr>
+          <a:xfrm>
+            <a:off x="1847850" y="4729161"/>
+            <a:ext cx="8877300" cy="1100137"/>
+          </a:xfrm>
+          <a:prstGeom prst="roundRect">
+            <a:avLst>
+              <a:gd name="adj" fmla="val 8000"/>
+            </a:avLst>
+          </a:prstGeom>
+          <a:solidFill>
+            <a:srgbClr val="F1F5F9"/>
+          </a:solidFill>
+          <a:ln>
+            <a:noFill/>
+          </a:ln>
+          <a:effectLst/>
+        </p:spPr>
+        <p:style>
+          <a:lnRef idx="1">
+            <a:schemeClr val="accent1"/>
+          </a:lnRef>
+          <a:fillRef idx="3">
+            <a:schemeClr val="accent1"/>
+          </a:fillRef>
+          <a:effectRef idx="2">
+            <a:schemeClr val="accent1"/>
+          </a:effectRef>
+          <a:fontRef idx="minor">
+            <a:schemeClr val="lt1"/>
+          </a:fontRef>
+        </p:style>
+        <p:txBody>
+          <a:bodyPr rtlCol="0" anchor="ctr"/>
+          <a:lstStyle/>
+          <a:p>
+            <a:pPr algn="ctr"/>
+          </a:p>
+        </p:txBody>
+      </p:sp>
+      <p:sp>
+        <p:nvSpPr>
+          <p:cNvPr id="57" name="TextBox 56"/>
+          <p:cNvSpPr txBox="1"/>
+          <p:nvPr/>
+        </p:nvSpPr>
+        <p:spPr>
+          <a:xfrm>
+            <a:off x="1962150" y="4500561"/>
+            <a:ext cx="1905000" cy="209550"/>
           </a:xfrm>
           <a:prstGeom prst="rect">
             <a:avLst/>
@@ -27776,145 +29416,27 @@
               </a:lnSpc>
             </a:pPr>
             <a:r>
-              <a:rPr sz="1200" b="1">
+              <a:rPr sz="1100" b="1">
                 <a:solidFill>
-                  <a:srgbClr val="475569"/>
+                  <a:srgbClr val="F59E0B"/>
                 </a:solidFill>
                 <a:latin typeface="PingFang SC"/>
               </a:rPr>
-              <a:t>启停</a:t>
-            </a:r>
-          </a:p>
-        </p:txBody>
-      </p:sp>
-      <p:cxnSp>
-        <p:nvCxnSpPr>
-          <p:cNvPr id="18" name="Connector 17"/>
-          <p:cNvCxnSpPr/>
-          <p:nvPr/>
-        </p:nvCxnSpPr>
-        <p:spPr>
-          <a:xfrm>
-            <a:off x="6096000" y="2033587"/>
-            <a:ext cx="0" cy="152400"/>
-          </a:xfrm>
-          <a:prstGeom prst="line">
-            <a:avLst/>
-          </a:prstGeom>
-          <a:ln w="15240">
-            <a:solidFill>
-              <a:srgbClr val="94A3B8"/>
-            </a:solidFill>
-          </a:ln>
-        </p:spPr>
-        <p:style>
-          <a:lnRef idx="2">
-            <a:schemeClr val="accent1"/>
-          </a:lnRef>
-          <a:fillRef idx="0">
-            <a:schemeClr val="accent1"/>
-          </a:fillRef>
-          <a:effectRef idx="1">
-            <a:schemeClr val="accent1"/>
-          </a:effectRef>
-          <a:fontRef idx="minor">
-            <a:schemeClr val="tx1"/>
-          </a:fontRef>
-        </p:style>
-      </p:cxnSp>
-      <p:sp>
-        <p:nvSpPr>
-          <p:cNvPr id="19" name="Isosceles Triangle 18"/>
-          <p:cNvSpPr/>
-          <p:nvPr/>
-        </p:nvSpPr>
-        <p:spPr>
-          <a:xfrm rot="10800000">
-            <a:off x="6053138" y="2100263"/>
-            <a:ext cx="85725" cy="85725"/>
-          </a:xfrm>
-          <a:prstGeom prst="triangle">
-            <a:avLst/>
-          </a:prstGeom>
-          <a:solidFill>
-            <a:srgbClr val="94A3B8"/>
-          </a:solidFill>
-          <a:ln>
-            <a:noFill/>
-          </a:ln>
-          <a:effectLst/>
-        </p:spPr>
-        <p:style>
-          <a:lnRef idx="1">
-            <a:schemeClr val="accent1"/>
-          </a:lnRef>
-          <a:fillRef idx="3">
-            <a:schemeClr val="accent1"/>
-          </a:fillRef>
-          <a:effectRef idx="2">
-            <a:schemeClr val="accent1"/>
-          </a:effectRef>
-          <a:fontRef idx="minor">
-            <a:schemeClr val="lt1"/>
-          </a:fontRef>
-        </p:style>
-        <p:txBody>
-          <a:bodyPr rtlCol="0" anchor="ctr"/>
-          <a:lstStyle/>
-          <a:p>
-            <a:pPr algn="ctr"/>
-          </a:p>
-        </p:txBody>
-      </p:sp>
-      <p:sp>
-        <p:nvSpPr>
-          <p:cNvPr id="20" name="TextBox 19"/>
-          <p:cNvSpPr txBox="1"/>
-          <p:nvPr/>
-        </p:nvSpPr>
-        <p:spPr>
-          <a:xfrm>
-            <a:off x="6248400" y="1976437"/>
-            <a:ext cx="2095500" cy="247650"/>
-          </a:xfrm>
-          <a:prstGeom prst="rect">
-            <a:avLst/>
-          </a:prstGeom>
-          <a:noFill/>
-        </p:spPr>
-        <p:txBody>
-          <a:bodyPr wrap="square" anchor="ctr">
-            <a:spAutoFit/>
-          </a:bodyPr>
-          <a:lstStyle/>
-          <a:p>
-            <a:pPr algn="l">
-              <a:lnSpc>
-                <a:spcPct val="100000"/>
-              </a:lnSpc>
-            </a:pPr>
-            <a:r>
-              <a:rPr sz="1000" b="0">
-                <a:solidFill>
-                  <a:srgbClr val="94A3B8"/>
-                </a:solidFill>
-                <a:latin typeface="PingFang SC"/>
-              </a:rPr>
-              <a:t>注册</a:t>
-            </a:r>
-          </a:p>
-        </p:txBody>
-      </p:sp>
-      <p:sp>
-        <p:nvSpPr>
-          <p:cNvPr id="21" name="Rounded Rectangle 20"/>
-          <p:cNvSpPr/>
-          <p:nvPr/>
-        </p:nvSpPr>
-        <p:spPr>
-          <a:xfrm>
-            <a:off x="1847850" y="2185987"/>
-            <a:ext cx="8877300" cy="1100137"/>
+              <a:t>L4</a:t>
+            </a:r>
+          </a:p>
+        </p:txBody>
+      </p:sp>
+      <p:sp>
+        <p:nvSpPr>
+          <p:cNvPr id="58" name="Rounded Rectangle 57"/>
+          <p:cNvSpPr/>
+          <p:nvPr/>
+        </p:nvSpPr>
+        <p:spPr>
+          <a:xfrm>
+            <a:off x="1905000" y="4767261"/>
+            <a:ext cx="4305300" cy="1023937"/>
           </a:xfrm>
           <a:prstGeom prst="roundRect">
             <a:avLst>
@@ -27922,7 +29444,53 @@
             </a:avLst>
           </a:prstGeom>
           <a:solidFill>
-            <a:srgbClr val="F1F5F9"/>
+            <a:srgbClr val="FFFFFF"/>
+          </a:solidFill>
+          <a:ln w="12700">
+            <a:solidFill>
+              <a:srgbClr val="F59E0B"/>
+            </a:solidFill>
+          </a:ln>
+          <a:effectLst/>
+        </p:spPr>
+        <p:style>
+          <a:lnRef idx="1">
+            <a:schemeClr val="accent1"/>
+          </a:lnRef>
+          <a:fillRef idx="3">
+            <a:schemeClr val="accent1"/>
+          </a:fillRef>
+          <a:effectRef idx="2">
+            <a:schemeClr val="accent1"/>
+          </a:effectRef>
+          <a:fontRef idx="minor">
+            <a:schemeClr val="lt1"/>
+          </a:fontRef>
+        </p:style>
+        <p:txBody>
+          <a:bodyPr rtlCol="0" anchor="ctr"/>
+          <a:lstStyle/>
+          <a:p>
+            <a:pPr algn="ctr"/>
+          </a:p>
+        </p:txBody>
+      </p:sp>
+      <p:sp>
+        <p:nvSpPr>
+          <p:cNvPr id="59" name="Rectangle 58"/>
+          <p:cNvSpPr/>
+          <p:nvPr/>
+        </p:nvSpPr>
+        <p:spPr>
+          <a:xfrm>
+            <a:off x="1905000" y="4767261"/>
+            <a:ext cx="47625" cy="1023937"/>
+          </a:xfrm>
+          <a:prstGeom prst="rect">
+            <a:avLst/>
+          </a:prstGeom>
+          <a:solidFill>
+            <a:srgbClr val="F59E0B"/>
           </a:solidFill>
           <a:ln>
             <a:noFill/>
@@ -27953,14 +29521,53 @@
       </p:sp>
       <p:sp>
         <p:nvSpPr>
-          <p:cNvPr id="22" name="Rounded Rectangle 21"/>
-          <p:cNvSpPr/>
-          <p:nvPr/>
-        </p:nvSpPr>
-        <p:spPr>
-          <a:xfrm>
-            <a:off x="1905000" y="2224087"/>
-            <a:ext cx="2076450" cy="1023937"/>
+          <p:cNvPr id="60" name="TextBox 59"/>
+          <p:cNvSpPr txBox="1"/>
+          <p:nvPr/>
+        </p:nvSpPr>
+        <p:spPr>
+          <a:xfrm>
+            <a:off x="2057400" y="4767261"/>
+            <a:ext cx="4038600" cy="1023937"/>
+          </a:xfrm>
+          <a:prstGeom prst="rect">
+            <a:avLst/>
+          </a:prstGeom>
+          <a:noFill/>
+        </p:spPr>
+        <p:txBody>
+          <a:bodyPr wrap="none" anchor="ctr">
+            <a:spAutoFit/>
+          </a:bodyPr>
+          <a:lstStyle/>
+          <a:p>
+            <a:pPr algn="l">
+              <a:lnSpc>
+                <a:spcPct val="115000"/>
+              </a:lnSpc>
+            </a:pPr>
+            <a:r>
+              <a:rPr sz="1100" b="1">
+                <a:solidFill>
+                  <a:srgbClr val="0B1D3A"/>
+                </a:solidFill>
+                <a:latin typeface="PingFang SC"/>
+              </a:rPr>
+              <a:t>外部:MCP Client</a:t>
+            </a:r>
+          </a:p>
+        </p:txBody>
+      </p:sp>
+      <p:sp>
+        <p:nvSpPr>
+          <p:cNvPr id="61" name="Rounded Rectangle 60"/>
+          <p:cNvSpPr/>
+          <p:nvPr/>
+        </p:nvSpPr>
+        <p:spPr>
+          <a:xfrm>
+            <a:off x="6362700" y="4767261"/>
+            <a:ext cx="4305300" cy="1023937"/>
           </a:xfrm>
           <a:prstGeom prst="roundRect">
             <a:avLst>
@@ -27972,7 +29579,7 @@
           </a:solidFill>
           <a:ln w="12700">
             <a:solidFill>
-              <a:srgbClr val="14B8A6"/>
+              <a:srgbClr val="F59E0B"/>
             </a:solidFill>
           </a:ln>
           <a:effectLst/>
@@ -28001,20 +29608,20 @@
       </p:sp>
       <p:sp>
         <p:nvSpPr>
-          <p:cNvPr id="23" name="Rectangle 22"/>
-          <p:cNvSpPr/>
-          <p:nvPr/>
-        </p:nvSpPr>
-        <p:spPr>
-          <a:xfrm>
-            <a:off x="1905000" y="2224087"/>
+          <p:cNvPr id="62" name="Rectangle 61"/>
+          <p:cNvSpPr/>
+          <p:nvPr/>
+        </p:nvSpPr>
+        <p:spPr>
+          <a:xfrm>
+            <a:off x="6362700" y="4767261"/>
             <a:ext cx="47625" cy="1023937"/>
           </a:xfrm>
           <a:prstGeom prst="rect">
             <a:avLst/>
           </a:prstGeom>
           <a:solidFill>
-            <a:srgbClr val="14B8A6"/>
+            <a:srgbClr val="F59E0B"/>
           </a:solidFill>
           <a:ln>
             <a:noFill/>
@@ -28045,14 +29652,14 @@
       </p:sp>
       <p:sp>
         <p:nvSpPr>
-          <p:cNvPr id="24" name="TextBox 23"/>
+          <p:cNvPr id="63" name="TextBox 62"/>
           <p:cNvSpPr txBox="1"/>
           <p:nvPr/>
         </p:nvSpPr>
         <p:spPr>
           <a:xfrm>
-            <a:off x="2038350" y="2224087"/>
-            <a:ext cx="1847850" cy="1023937"/>
+            <a:off x="6515100" y="4767261"/>
+            <a:ext cx="4038600" cy="1023937"/>
           </a:xfrm>
           <a:prstGeom prst="rect">
             <a:avLst/>
@@ -28060,1396 +29667,20 @@
           <a:noFill/>
         </p:spPr>
         <p:txBody>
-          <a:bodyPr wrap="square" anchor="ctr">
+          <a:bodyPr wrap="none" anchor="ctr">
             <a:spAutoFit/>
           </a:bodyPr>
           <a:lstStyle/>
           <a:p>
             <a:pPr algn="l">
               <a:lnSpc>
-                <a:spcPct val="100000"/>
+                <a:spcPct val="115000"/>
               </a:lnSpc>
             </a:pPr>
             <a:r>
-              <a:rPr sz="1200" b="1">
+              <a:rPr sz="1300" b="1">
                 <a:solidFill>
-                  <a:srgbClr val="475569"/>
-                </a:solidFill>
-                <a:latin typeface="PingFang SC"/>
-              </a:rPr>
-              <a:t>执行:权限</a:t>
-            </a:r>
-          </a:p>
-        </p:txBody>
-      </p:sp>
-      <p:sp>
-        <p:nvSpPr>
-          <p:cNvPr id="25" name="Rounded Rectangle 24"/>
-          <p:cNvSpPr/>
-          <p:nvPr/>
-        </p:nvSpPr>
-        <p:spPr>
-          <a:xfrm>
-            <a:off x="4133850" y="2224087"/>
-            <a:ext cx="2076450" cy="1023937"/>
-          </a:xfrm>
-          <a:prstGeom prst="roundRect">
-            <a:avLst>
-              <a:gd name="adj" fmla="val 8000"/>
-            </a:avLst>
-          </a:prstGeom>
-          <a:solidFill>
-            <a:srgbClr val="FFFFFF"/>
-          </a:solidFill>
-          <a:ln w="12700">
-            <a:solidFill>
-              <a:srgbClr val="14B8A6"/>
-            </a:solidFill>
-          </a:ln>
-          <a:effectLst/>
-        </p:spPr>
-        <p:style>
-          <a:lnRef idx="1">
-            <a:schemeClr val="accent1"/>
-          </a:lnRef>
-          <a:fillRef idx="3">
-            <a:schemeClr val="accent1"/>
-          </a:fillRef>
-          <a:effectRef idx="2">
-            <a:schemeClr val="accent1"/>
-          </a:effectRef>
-          <a:fontRef idx="minor">
-            <a:schemeClr val="lt1"/>
-          </a:fontRef>
-        </p:style>
-        <p:txBody>
-          <a:bodyPr rtlCol="0" anchor="ctr"/>
-          <a:lstStyle/>
-          <a:p>
-            <a:pPr algn="ctr"/>
-          </a:p>
-        </p:txBody>
-      </p:sp>
-      <p:sp>
-        <p:nvSpPr>
-          <p:cNvPr id="26" name="Rectangle 25"/>
-          <p:cNvSpPr/>
-          <p:nvPr/>
-        </p:nvSpPr>
-        <p:spPr>
-          <a:xfrm>
-            <a:off x="4133850" y="2224087"/>
-            <a:ext cx="47625" cy="1023937"/>
-          </a:xfrm>
-          <a:prstGeom prst="rect">
-            <a:avLst/>
-          </a:prstGeom>
-          <a:solidFill>
-            <a:srgbClr val="14B8A6"/>
-          </a:solidFill>
-          <a:ln>
-            <a:noFill/>
-          </a:ln>
-          <a:effectLst/>
-        </p:spPr>
-        <p:style>
-          <a:lnRef idx="1">
-            <a:schemeClr val="accent1"/>
-          </a:lnRef>
-          <a:fillRef idx="3">
-            <a:schemeClr val="accent1"/>
-          </a:fillRef>
-          <a:effectRef idx="2">
-            <a:schemeClr val="accent1"/>
-          </a:effectRef>
-          <a:fontRef idx="minor">
-            <a:schemeClr val="lt1"/>
-          </a:fontRef>
-        </p:style>
-        <p:txBody>
-          <a:bodyPr rtlCol="0" anchor="ctr"/>
-          <a:lstStyle/>
-          <a:p>
-            <a:pPr algn="ctr"/>
-          </a:p>
-        </p:txBody>
-      </p:sp>
-      <p:sp>
-        <p:nvSpPr>
-          <p:cNvPr id="27" name="TextBox 26"/>
-          <p:cNvSpPr txBox="1"/>
-          <p:nvPr/>
-        </p:nvSpPr>
-        <p:spPr>
-          <a:xfrm>
-            <a:off x="4267200" y="2224087"/>
-            <a:ext cx="1847850" cy="1023937"/>
-          </a:xfrm>
-          <a:prstGeom prst="rect">
-            <a:avLst/>
-          </a:prstGeom>
-          <a:noFill/>
-        </p:spPr>
-        <p:txBody>
-          <a:bodyPr wrap="square" anchor="ctr">
-            <a:spAutoFit/>
-          </a:bodyPr>
-          <a:lstStyle/>
-          <a:p>
-            <a:pPr algn="l">
-              <a:lnSpc>
-                <a:spcPct val="100000"/>
-              </a:lnSpc>
-            </a:pPr>
-            <a:r>
-              <a:rPr sz="1200" b="1">
-                <a:solidFill>
-                  <a:srgbClr val="475569"/>
-                </a:solidFill>
-                <a:latin typeface="PingFang SC"/>
-              </a:rPr>
-              <a:t>Schema 校验</a:t>
-            </a:r>
-          </a:p>
-        </p:txBody>
-      </p:sp>
-      <p:sp>
-        <p:nvSpPr>
-          <p:cNvPr id="28" name="Rounded Rectangle 27"/>
-          <p:cNvSpPr/>
-          <p:nvPr/>
-        </p:nvSpPr>
-        <p:spPr>
-          <a:xfrm>
-            <a:off x="6362700" y="2224087"/>
-            <a:ext cx="2076450" cy="1023937"/>
-          </a:xfrm>
-          <a:prstGeom prst="roundRect">
-            <a:avLst>
-              <a:gd name="adj" fmla="val 8000"/>
-            </a:avLst>
-          </a:prstGeom>
-          <a:solidFill>
-            <a:srgbClr val="FFFFFF"/>
-          </a:solidFill>
-          <a:ln w="12700">
-            <a:solidFill>
-              <a:srgbClr val="14B8A6"/>
-            </a:solidFill>
-          </a:ln>
-          <a:effectLst/>
-        </p:spPr>
-        <p:style>
-          <a:lnRef idx="1">
-            <a:schemeClr val="accent1"/>
-          </a:lnRef>
-          <a:fillRef idx="3">
-            <a:schemeClr val="accent1"/>
-          </a:fillRef>
-          <a:effectRef idx="2">
-            <a:schemeClr val="accent1"/>
-          </a:effectRef>
-          <a:fontRef idx="minor">
-            <a:schemeClr val="lt1"/>
-          </a:fontRef>
-        </p:style>
-        <p:txBody>
-          <a:bodyPr rtlCol="0" anchor="ctr"/>
-          <a:lstStyle/>
-          <a:p>
-            <a:pPr algn="ctr"/>
-          </a:p>
-        </p:txBody>
-      </p:sp>
-      <p:sp>
-        <p:nvSpPr>
-          <p:cNvPr id="29" name="Rectangle 28"/>
-          <p:cNvSpPr/>
-          <p:nvPr/>
-        </p:nvSpPr>
-        <p:spPr>
-          <a:xfrm>
-            <a:off x="6362700" y="2224087"/>
-            <a:ext cx="47625" cy="1023937"/>
-          </a:xfrm>
-          <a:prstGeom prst="rect">
-            <a:avLst/>
-          </a:prstGeom>
-          <a:solidFill>
-            <a:srgbClr val="14B8A6"/>
-          </a:solidFill>
-          <a:ln>
-            <a:noFill/>
-          </a:ln>
-          <a:effectLst/>
-        </p:spPr>
-        <p:style>
-          <a:lnRef idx="1">
-            <a:schemeClr val="accent1"/>
-          </a:lnRef>
-          <a:fillRef idx="3">
-            <a:schemeClr val="accent1"/>
-          </a:fillRef>
-          <a:effectRef idx="2">
-            <a:schemeClr val="accent1"/>
-          </a:effectRef>
-          <a:fontRef idx="minor">
-            <a:schemeClr val="lt1"/>
-          </a:fontRef>
-        </p:style>
-        <p:txBody>
-          <a:bodyPr rtlCol="0" anchor="ctr"/>
-          <a:lstStyle/>
-          <a:p>
-            <a:pPr algn="ctr"/>
-          </a:p>
-        </p:txBody>
-      </p:sp>
-      <p:sp>
-        <p:nvSpPr>
-          <p:cNvPr id="30" name="TextBox 29"/>
-          <p:cNvSpPr txBox="1"/>
-          <p:nvPr/>
-        </p:nvSpPr>
-        <p:spPr>
-          <a:xfrm>
-            <a:off x="6496050" y="2224087"/>
-            <a:ext cx="1847850" cy="1023937"/>
-          </a:xfrm>
-          <a:prstGeom prst="rect">
-            <a:avLst/>
-          </a:prstGeom>
-          <a:noFill/>
-        </p:spPr>
-        <p:txBody>
-          <a:bodyPr wrap="square" anchor="ctr">
-            <a:spAutoFit/>
-          </a:bodyPr>
-          <a:lstStyle/>
-          <a:p>
-            <a:pPr algn="l">
-              <a:lnSpc>
-                <a:spcPct val="100000"/>
-              </a:lnSpc>
-            </a:pPr>
-            <a:r>
-              <a:rPr sz="1200" b="1">
-                <a:solidFill>
-                  <a:srgbClr val="475569"/>
-                </a:solidFill>
-                <a:latin typeface="PingFang SC"/>
-              </a:rPr>
-              <a:t>超时</a:t>
-            </a:r>
-          </a:p>
-        </p:txBody>
-      </p:sp>
-      <p:sp>
-        <p:nvSpPr>
-          <p:cNvPr id="31" name="Rounded Rectangle 30"/>
-          <p:cNvSpPr/>
-          <p:nvPr/>
-        </p:nvSpPr>
-        <p:spPr>
-          <a:xfrm>
-            <a:off x="8591550" y="2224087"/>
-            <a:ext cx="2076450" cy="1023937"/>
-          </a:xfrm>
-          <a:prstGeom prst="roundRect">
-            <a:avLst>
-              <a:gd name="adj" fmla="val 8000"/>
-            </a:avLst>
-          </a:prstGeom>
-          <a:solidFill>
-            <a:srgbClr val="FFFFFF"/>
-          </a:solidFill>
-          <a:ln w="12700">
-            <a:solidFill>
-              <a:srgbClr val="14B8A6"/>
-            </a:solidFill>
-          </a:ln>
-          <a:effectLst/>
-        </p:spPr>
-        <p:style>
-          <a:lnRef idx="1">
-            <a:schemeClr val="accent1"/>
-          </a:lnRef>
-          <a:fillRef idx="3">
-            <a:schemeClr val="accent1"/>
-          </a:fillRef>
-          <a:effectRef idx="2">
-            <a:schemeClr val="accent1"/>
-          </a:effectRef>
-          <a:fontRef idx="minor">
-            <a:schemeClr val="lt1"/>
-          </a:fontRef>
-        </p:style>
-        <p:txBody>
-          <a:bodyPr rtlCol="0" anchor="ctr"/>
-          <a:lstStyle/>
-          <a:p>
-            <a:pPr algn="ctr"/>
-          </a:p>
-        </p:txBody>
-      </p:sp>
-      <p:sp>
-        <p:nvSpPr>
-          <p:cNvPr id="32" name="Rectangle 31"/>
-          <p:cNvSpPr/>
-          <p:nvPr/>
-        </p:nvSpPr>
-        <p:spPr>
-          <a:xfrm>
-            <a:off x="8591550" y="2224087"/>
-            <a:ext cx="47625" cy="1023937"/>
-          </a:xfrm>
-          <a:prstGeom prst="rect">
-            <a:avLst/>
-          </a:prstGeom>
-          <a:solidFill>
-            <a:srgbClr val="14B8A6"/>
-          </a:solidFill>
-          <a:ln>
-            <a:noFill/>
-          </a:ln>
-          <a:effectLst/>
-        </p:spPr>
-        <p:style>
-          <a:lnRef idx="1">
-            <a:schemeClr val="accent1"/>
-          </a:lnRef>
-          <a:fillRef idx="3">
-            <a:schemeClr val="accent1"/>
-          </a:fillRef>
-          <a:effectRef idx="2">
-            <a:schemeClr val="accent1"/>
-          </a:effectRef>
-          <a:fontRef idx="minor">
-            <a:schemeClr val="lt1"/>
-          </a:fontRef>
-        </p:style>
-        <p:txBody>
-          <a:bodyPr rtlCol="0" anchor="ctr"/>
-          <a:lstStyle/>
-          <a:p>
-            <a:pPr algn="ctr"/>
-          </a:p>
-        </p:txBody>
-      </p:sp>
-      <p:sp>
-        <p:nvSpPr>
-          <p:cNvPr id="33" name="TextBox 32"/>
-          <p:cNvSpPr txBox="1"/>
-          <p:nvPr/>
-        </p:nvSpPr>
-        <p:spPr>
-          <a:xfrm>
-            <a:off x="8724900" y="2224087"/>
-            <a:ext cx="1847850" cy="1023937"/>
-          </a:xfrm>
-          <a:prstGeom prst="rect">
-            <a:avLst/>
-          </a:prstGeom>
-          <a:noFill/>
-        </p:spPr>
-        <p:txBody>
-          <a:bodyPr wrap="square" anchor="ctr">
-            <a:spAutoFit/>
-          </a:bodyPr>
-          <a:lstStyle/>
-          <a:p>
-            <a:pPr algn="l">
-              <a:lnSpc>
-                <a:spcPct val="100000"/>
-              </a:lnSpc>
-            </a:pPr>
-            <a:r>
-              <a:rPr sz="1200" b="1">
-                <a:solidFill>
-                  <a:srgbClr val="475569"/>
-                </a:solidFill>
-                <a:latin typeface="PingFang SC"/>
-              </a:rPr>
-              <a:t>重试</a:t>
-            </a:r>
-          </a:p>
-        </p:txBody>
-      </p:sp>
-      <p:cxnSp>
-        <p:nvCxnSpPr>
-          <p:cNvPr id="34" name="Connector 33"/>
-          <p:cNvCxnSpPr/>
-          <p:nvPr/>
-        </p:nvCxnSpPr>
-        <p:spPr>
-          <a:xfrm>
-            <a:off x="6096000" y="3305174"/>
-            <a:ext cx="0" cy="152400"/>
-          </a:xfrm>
-          <a:prstGeom prst="line">
-            <a:avLst/>
-          </a:prstGeom>
-          <a:ln w="15240">
-            <a:solidFill>
-              <a:srgbClr val="94A3B8"/>
-            </a:solidFill>
-          </a:ln>
-        </p:spPr>
-        <p:style>
-          <a:lnRef idx="2">
-            <a:schemeClr val="accent1"/>
-          </a:lnRef>
-          <a:fillRef idx="0">
-            <a:schemeClr val="accent1"/>
-          </a:fillRef>
-          <a:effectRef idx="1">
-            <a:schemeClr val="accent1"/>
-          </a:effectRef>
-          <a:fontRef idx="minor">
-            <a:schemeClr val="tx1"/>
-          </a:fontRef>
-        </p:style>
-      </p:cxnSp>
-      <p:sp>
-        <p:nvSpPr>
-          <p:cNvPr id="35" name="Isosceles Triangle 34"/>
-          <p:cNvSpPr/>
-          <p:nvPr/>
-        </p:nvSpPr>
-        <p:spPr>
-          <a:xfrm rot="10800000">
-            <a:off x="6053138" y="3371850"/>
-            <a:ext cx="85725" cy="85725"/>
-          </a:xfrm>
-          <a:prstGeom prst="triangle">
-            <a:avLst/>
-          </a:prstGeom>
-          <a:solidFill>
-            <a:srgbClr val="94A3B8"/>
-          </a:solidFill>
-          <a:ln>
-            <a:noFill/>
-          </a:ln>
-          <a:effectLst/>
-        </p:spPr>
-        <p:style>
-          <a:lnRef idx="1">
-            <a:schemeClr val="accent1"/>
-          </a:lnRef>
-          <a:fillRef idx="3">
-            <a:schemeClr val="accent1"/>
-          </a:fillRef>
-          <a:effectRef idx="2">
-            <a:schemeClr val="accent1"/>
-          </a:effectRef>
-          <a:fontRef idx="minor">
-            <a:schemeClr val="lt1"/>
-          </a:fontRef>
-        </p:style>
-        <p:txBody>
-          <a:bodyPr rtlCol="0" anchor="ctr"/>
-          <a:lstStyle/>
-          <a:p>
-            <a:pPr algn="ctr"/>
-          </a:p>
-        </p:txBody>
-      </p:sp>
-      <p:sp>
-        <p:nvSpPr>
-          <p:cNvPr id="36" name="TextBox 35"/>
-          <p:cNvSpPr txBox="1"/>
-          <p:nvPr/>
-        </p:nvSpPr>
-        <p:spPr>
-          <a:xfrm>
-            <a:off x="6248400" y="3248024"/>
-            <a:ext cx="2095500" cy="247650"/>
-          </a:xfrm>
-          <a:prstGeom prst="rect">
-            <a:avLst/>
-          </a:prstGeom>
-          <a:noFill/>
-        </p:spPr>
-        <p:txBody>
-          <a:bodyPr wrap="square" anchor="ctr">
-            <a:spAutoFit/>
-          </a:bodyPr>
-          <a:lstStyle/>
-          <a:p>
-            <a:pPr algn="l">
-              <a:lnSpc>
-                <a:spcPct val="100000"/>
-              </a:lnSpc>
-            </a:pPr>
-            <a:r>
-              <a:rPr sz="1000" b="0">
-                <a:solidFill>
-                  <a:srgbClr val="94A3B8"/>
-                </a:solidFill>
-                <a:latin typeface="PingFang SC"/>
-              </a:rPr>
-              <a:t>治理</a:t>
-            </a:r>
-          </a:p>
-        </p:txBody>
-      </p:sp>
-      <p:sp>
-        <p:nvSpPr>
-          <p:cNvPr id="37" name="Rounded Rectangle 36"/>
-          <p:cNvSpPr/>
-          <p:nvPr/>
-        </p:nvSpPr>
-        <p:spPr>
-          <a:xfrm>
-            <a:off x="1847850" y="3457574"/>
-            <a:ext cx="8877300" cy="1100137"/>
-          </a:xfrm>
-          <a:prstGeom prst="roundRect">
-            <a:avLst>
-              <a:gd name="adj" fmla="val 8000"/>
-            </a:avLst>
-          </a:prstGeom>
-          <a:solidFill>
-            <a:srgbClr val="F1F5F9"/>
-          </a:solidFill>
-          <a:ln>
-            <a:noFill/>
-          </a:ln>
-          <a:effectLst/>
-        </p:spPr>
-        <p:style>
-          <a:lnRef idx="1">
-            <a:schemeClr val="accent1"/>
-          </a:lnRef>
-          <a:fillRef idx="3">
-            <a:schemeClr val="accent1"/>
-          </a:fillRef>
-          <a:effectRef idx="2">
-            <a:schemeClr val="accent1"/>
-          </a:effectRef>
-          <a:fontRef idx="minor">
-            <a:schemeClr val="lt1"/>
-          </a:fontRef>
-        </p:style>
-        <p:txBody>
-          <a:bodyPr rtlCol="0" anchor="ctr"/>
-          <a:lstStyle/>
-          <a:p>
-            <a:pPr algn="ctr"/>
-          </a:p>
-        </p:txBody>
-      </p:sp>
-      <p:sp>
-        <p:nvSpPr>
-          <p:cNvPr id="38" name="Rounded Rectangle 37"/>
-          <p:cNvSpPr/>
-          <p:nvPr/>
-        </p:nvSpPr>
-        <p:spPr>
-          <a:xfrm>
-            <a:off x="1905000" y="3495674"/>
-            <a:ext cx="2819400" cy="1023937"/>
-          </a:xfrm>
-          <a:prstGeom prst="roundRect">
-            <a:avLst>
-              <a:gd name="adj" fmla="val 8000"/>
-            </a:avLst>
-          </a:prstGeom>
-          <a:solidFill>
-            <a:srgbClr val="FFFFFF"/>
-          </a:solidFill>
-          <a:ln w="12700">
-            <a:solidFill>
-              <a:srgbClr val="8B5CF6"/>
-            </a:solidFill>
-          </a:ln>
-          <a:effectLst/>
-        </p:spPr>
-        <p:style>
-          <a:lnRef idx="1">
-            <a:schemeClr val="accent1"/>
-          </a:lnRef>
-          <a:fillRef idx="3">
-            <a:schemeClr val="accent1"/>
-          </a:fillRef>
-          <a:effectRef idx="2">
-            <a:schemeClr val="accent1"/>
-          </a:effectRef>
-          <a:fontRef idx="minor">
-            <a:schemeClr val="lt1"/>
-          </a:fontRef>
-        </p:style>
-        <p:txBody>
-          <a:bodyPr rtlCol="0" anchor="ctr"/>
-          <a:lstStyle/>
-          <a:p>
-            <a:pPr algn="ctr"/>
-          </a:p>
-        </p:txBody>
-      </p:sp>
-      <p:sp>
-        <p:nvSpPr>
-          <p:cNvPr id="39" name="Rectangle 38"/>
-          <p:cNvSpPr/>
-          <p:nvPr/>
-        </p:nvSpPr>
-        <p:spPr>
-          <a:xfrm>
-            <a:off x="1905000" y="3495674"/>
-            <a:ext cx="47625" cy="1023937"/>
-          </a:xfrm>
-          <a:prstGeom prst="rect">
-            <a:avLst/>
-          </a:prstGeom>
-          <a:solidFill>
-            <a:srgbClr val="8B5CF6"/>
-          </a:solidFill>
-          <a:ln>
-            <a:noFill/>
-          </a:ln>
-          <a:effectLst/>
-        </p:spPr>
-        <p:style>
-          <a:lnRef idx="1">
-            <a:schemeClr val="accent1"/>
-          </a:lnRef>
-          <a:fillRef idx="3">
-            <a:schemeClr val="accent1"/>
-          </a:fillRef>
-          <a:effectRef idx="2">
-            <a:schemeClr val="accent1"/>
-          </a:effectRef>
-          <a:fontRef idx="minor">
-            <a:schemeClr val="lt1"/>
-          </a:fontRef>
-        </p:style>
-        <p:txBody>
-          <a:bodyPr rtlCol="0" anchor="ctr"/>
-          <a:lstStyle/>
-          <a:p>
-            <a:pPr algn="ctr"/>
-          </a:p>
-        </p:txBody>
-      </p:sp>
-      <p:sp>
-        <p:nvSpPr>
-          <p:cNvPr id="40" name="TextBox 39"/>
-          <p:cNvSpPr txBox="1"/>
-          <p:nvPr/>
-        </p:nvSpPr>
-        <p:spPr>
-          <a:xfrm>
-            <a:off x="2038350" y="3495674"/>
-            <a:ext cx="2590800" cy="1023937"/>
-          </a:xfrm>
-          <a:prstGeom prst="rect">
-            <a:avLst/>
-          </a:prstGeom>
-          <a:noFill/>
-        </p:spPr>
-        <p:txBody>
-          <a:bodyPr wrap="square" anchor="ctr">
-            <a:spAutoFit/>
-          </a:bodyPr>
-          <a:lstStyle/>
-          <a:p>
-            <a:pPr algn="l">
-              <a:lnSpc>
-                <a:spcPct val="100000"/>
-              </a:lnSpc>
-            </a:pPr>
-            <a:r>
-              <a:rPr sz="1200" b="1">
-                <a:solidFill>
-                  <a:srgbClr val="475569"/>
-                </a:solidFill>
-                <a:latin typeface="PingFang SC"/>
-              </a:rPr>
-              <a:t>审计:InMemory</a:t>
-            </a:r>
-          </a:p>
-        </p:txBody>
-      </p:sp>
-      <p:sp>
-        <p:nvSpPr>
-          <p:cNvPr id="41" name="Rounded Rectangle 40"/>
-          <p:cNvSpPr/>
-          <p:nvPr/>
-        </p:nvSpPr>
-        <p:spPr>
-          <a:xfrm>
-            <a:off x="4876800" y="3495674"/>
-            <a:ext cx="2819400" cy="1023937"/>
-          </a:xfrm>
-          <a:prstGeom prst="roundRect">
-            <a:avLst>
-              <a:gd name="adj" fmla="val 8000"/>
-            </a:avLst>
-          </a:prstGeom>
-          <a:solidFill>
-            <a:srgbClr val="FFFFFF"/>
-          </a:solidFill>
-          <a:ln w="12700">
-            <a:solidFill>
-              <a:srgbClr val="8B5CF6"/>
-            </a:solidFill>
-          </a:ln>
-          <a:effectLst/>
-        </p:spPr>
-        <p:style>
-          <a:lnRef idx="1">
-            <a:schemeClr val="accent1"/>
-          </a:lnRef>
-          <a:fillRef idx="3">
-            <a:schemeClr val="accent1"/>
-          </a:fillRef>
-          <a:effectRef idx="2">
-            <a:schemeClr val="accent1"/>
-          </a:effectRef>
-          <a:fontRef idx="minor">
-            <a:schemeClr val="lt1"/>
-          </a:fontRef>
-        </p:style>
-        <p:txBody>
-          <a:bodyPr rtlCol="0" anchor="ctr"/>
-          <a:lstStyle/>
-          <a:p>
-            <a:pPr algn="ctr"/>
-          </a:p>
-        </p:txBody>
-      </p:sp>
-      <p:sp>
-        <p:nvSpPr>
-          <p:cNvPr id="42" name="Rectangle 41"/>
-          <p:cNvSpPr/>
-          <p:nvPr/>
-        </p:nvSpPr>
-        <p:spPr>
-          <a:xfrm>
-            <a:off x="4876800" y="3495674"/>
-            <a:ext cx="47625" cy="1023937"/>
-          </a:xfrm>
-          <a:prstGeom prst="rect">
-            <a:avLst/>
-          </a:prstGeom>
-          <a:solidFill>
-            <a:srgbClr val="8B5CF6"/>
-          </a:solidFill>
-          <a:ln>
-            <a:noFill/>
-          </a:ln>
-          <a:effectLst/>
-        </p:spPr>
-        <p:style>
-          <a:lnRef idx="1">
-            <a:schemeClr val="accent1"/>
-          </a:lnRef>
-          <a:fillRef idx="3">
-            <a:schemeClr val="accent1"/>
-          </a:fillRef>
-          <a:effectRef idx="2">
-            <a:schemeClr val="accent1"/>
-          </a:effectRef>
-          <a:fontRef idx="minor">
-            <a:schemeClr val="lt1"/>
-          </a:fontRef>
-        </p:style>
-        <p:txBody>
-          <a:bodyPr rtlCol="0" anchor="ctr"/>
-          <a:lstStyle/>
-          <a:p>
-            <a:pPr algn="ctr"/>
-          </a:p>
-        </p:txBody>
-      </p:sp>
-      <p:sp>
-        <p:nvSpPr>
-          <p:cNvPr id="43" name="TextBox 42"/>
-          <p:cNvSpPr txBox="1"/>
-          <p:nvPr/>
-        </p:nvSpPr>
-        <p:spPr>
-          <a:xfrm>
-            <a:off x="5010150" y="3495674"/>
-            <a:ext cx="2590800" cy="1023937"/>
-          </a:xfrm>
-          <a:prstGeom prst="rect">
-            <a:avLst/>
-          </a:prstGeom>
-          <a:noFill/>
-        </p:spPr>
-        <p:txBody>
-          <a:bodyPr wrap="square" anchor="ctr">
-            <a:spAutoFit/>
-          </a:bodyPr>
-          <a:lstStyle/>
-          <a:p>
-            <a:pPr algn="l">
-              <a:lnSpc>
-                <a:spcPct val="100000"/>
-              </a:lnSpc>
-            </a:pPr>
-            <a:r>
-              <a:rPr sz="1200" b="1">
-                <a:solidFill>
-                  <a:srgbClr val="475569"/>
-                </a:solidFill>
-                <a:latin typeface="PingFang SC"/>
-              </a:rPr>
-              <a:t>Pulsar 适配(降级)</a:t>
-            </a:r>
-          </a:p>
-        </p:txBody>
-      </p:sp>
-      <p:sp>
-        <p:nvSpPr>
-          <p:cNvPr id="44" name="Rounded Rectangle 43"/>
-          <p:cNvSpPr/>
-          <p:nvPr/>
-        </p:nvSpPr>
-        <p:spPr>
-          <a:xfrm>
-            <a:off x="7848600" y="3495674"/>
-            <a:ext cx="2819400" cy="1023937"/>
-          </a:xfrm>
-          <a:prstGeom prst="roundRect">
-            <a:avLst>
-              <a:gd name="adj" fmla="val 8000"/>
-            </a:avLst>
-          </a:prstGeom>
-          <a:solidFill>
-            <a:srgbClr val="FFFFFF"/>
-          </a:solidFill>
-          <a:ln w="12700">
-            <a:solidFill>
-              <a:srgbClr val="8B5CF6"/>
-            </a:solidFill>
-          </a:ln>
-          <a:effectLst/>
-        </p:spPr>
-        <p:style>
-          <a:lnRef idx="1">
-            <a:schemeClr val="accent1"/>
-          </a:lnRef>
-          <a:fillRef idx="3">
-            <a:schemeClr val="accent1"/>
-          </a:fillRef>
-          <a:effectRef idx="2">
-            <a:schemeClr val="accent1"/>
-          </a:effectRef>
-          <a:fontRef idx="minor">
-            <a:schemeClr val="lt1"/>
-          </a:fontRef>
-        </p:style>
-        <p:txBody>
-          <a:bodyPr rtlCol="0" anchor="ctr"/>
-          <a:lstStyle/>
-          <a:p>
-            <a:pPr algn="ctr"/>
-          </a:p>
-        </p:txBody>
-      </p:sp>
-      <p:sp>
-        <p:nvSpPr>
-          <p:cNvPr id="45" name="Rectangle 44"/>
-          <p:cNvSpPr/>
-          <p:nvPr/>
-        </p:nvSpPr>
-        <p:spPr>
-          <a:xfrm>
-            <a:off x="7848600" y="3495674"/>
-            <a:ext cx="47625" cy="1023937"/>
-          </a:xfrm>
-          <a:prstGeom prst="rect">
-            <a:avLst/>
-          </a:prstGeom>
-          <a:solidFill>
-            <a:srgbClr val="8B5CF6"/>
-          </a:solidFill>
-          <a:ln>
-            <a:noFill/>
-          </a:ln>
-          <a:effectLst/>
-        </p:spPr>
-        <p:style>
-          <a:lnRef idx="1">
-            <a:schemeClr val="accent1"/>
-          </a:lnRef>
-          <a:fillRef idx="3">
-            <a:schemeClr val="accent1"/>
-          </a:fillRef>
-          <a:effectRef idx="2">
-            <a:schemeClr val="accent1"/>
-          </a:effectRef>
-          <a:fontRef idx="minor">
-            <a:schemeClr val="lt1"/>
-          </a:fontRef>
-        </p:style>
-        <p:txBody>
-          <a:bodyPr rtlCol="0" anchor="ctr"/>
-          <a:lstStyle/>
-          <a:p>
-            <a:pPr algn="ctr"/>
-          </a:p>
-        </p:txBody>
-      </p:sp>
-      <p:sp>
-        <p:nvSpPr>
-          <p:cNvPr id="46" name="TextBox 45"/>
-          <p:cNvSpPr txBox="1"/>
-          <p:nvPr/>
-        </p:nvSpPr>
-        <p:spPr>
-          <a:xfrm>
-            <a:off x="7981950" y="3495674"/>
-            <a:ext cx="2590800" cy="1023937"/>
-          </a:xfrm>
-          <a:prstGeom prst="rect">
-            <a:avLst/>
-          </a:prstGeom>
-          <a:noFill/>
-        </p:spPr>
-        <p:txBody>
-          <a:bodyPr wrap="square" anchor="ctr">
-            <a:spAutoFit/>
-          </a:bodyPr>
-          <a:lstStyle/>
-          <a:p>
-            <a:pPr algn="l">
-              <a:lnSpc>
-                <a:spcPct val="100000"/>
-              </a:lnSpc>
-            </a:pPr>
-            <a:r>
-              <a:rPr sz="1200" b="1">
-                <a:solidFill>
-                  <a:srgbClr val="475569"/>
-                </a:solidFill>
-                <a:latin typeface="PingFang SC"/>
-              </a:rPr>
-              <a:t>哈希链</a:t>
-            </a:r>
-          </a:p>
-        </p:txBody>
-      </p:sp>
-      <p:cxnSp>
-        <p:nvCxnSpPr>
-          <p:cNvPr id="47" name="Connector 46"/>
-          <p:cNvCxnSpPr/>
-          <p:nvPr/>
-        </p:nvCxnSpPr>
-        <p:spPr>
-          <a:xfrm>
-            <a:off x="6096000" y="4576761"/>
-            <a:ext cx="0" cy="152400"/>
-          </a:xfrm>
-          <a:prstGeom prst="line">
-            <a:avLst/>
-          </a:prstGeom>
-          <a:ln w="15240">
-            <a:solidFill>
-              <a:srgbClr val="94A3B8"/>
-            </a:solidFill>
-          </a:ln>
-        </p:spPr>
-        <p:style>
-          <a:lnRef idx="2">
-            <a:schemeClr val="accent1"/>
-          </a:lnRef>
-          <a:fillRef idx="0">
-            <a:schemeClr val="accent1"/>
-          </a:fillRef>
-          <a:effectRef idx="1">
-            <a:schemeClr val="accent1"/>
-          </a:effectRef>
-          <a:fontRef idx="minor">
-            <a:schemeClr val="tx1"/>
-          </a:fontRef>
-        </p:style>
-      </p:cxnSp>
-      <p:sp>
-        <p:nvSpPr>
-          <p:cNvPr id="48" name="Isosceles Triangle 47"/>
-          <p:cNvSpPr/>
-          <p:nvPr/>
-        </p:nvSpPr>
-        <p:spPr>
-          <a:xfrm rot="10800000">
-            <a:off x="6053138" y="4643437"/>
-            <a:ext cx="85725" cy="85725"/>
-          </a:xfrm>
-          <a:prstGeom prst="triangle">
-            <a:avLst/>
-          </a:prstGeom>
-          <a:solidFill>
-            <a:srgbClr val="94A3B8"/>
-          </a:solidFill>
-          <a:ln>
-            <a:noFill/>
-          </a:ln>
-          <a:effectLst/>
-        </p:spPr>
-        <p:style>
-          <a:lnRef idx="1">
-            <a:schemeClr val="accent1"/>
-          </a:lnRef>
-          <a:fillRef idx="3">
-            <a:schemeClr val="accent1"/>
-          </a:fillRef>
-          <a:effectRef idx="2">
-            <a:schemeClr val="accent1"/>
-          </a:effectRef>
-          <a:fontRef idx="minor">
-            <a:schemeClr val="lt1"/>
-          </a:fontRef>
-        </p:style>
-        <p:txBody>
-          <a:bodyPr rtlCol="0" anchor="ctr"/>
-          <a:lstStyle/>
-          <a:p>
-            <a:pPr algn="ctr"/>
-          </a:p>
-        </p:txBody>
-      </p:sp>
-      <p:sp>
-        <p:nvSpPr>
-          <p:cNvPr id="49" name="TextBox 48"/>
-          <p:cNvSpPr txBox="1"/>
-          <p:nvPr/>
-        </p:nvSpPr>
-        <p:spPr>
-          <a:xfrm>
-            <a:off x="6248400" y="4519611"/>
-            <a:ext cx="2095500" cy="247650"/>
-          </a:xfrm>
-          <a:prstGeom prst="rect">
-            <a:avLst/>
-          </a:prstGeom>
-          <a:noFill/>
-        </p:spPr>
-        <p:txBody>
-          <a:bodyPr wrap="square" anchor="ctr">
-            <a:spAutoFit/>
-          </a:bodyPr>
-          <a:lstStyle/>
-          <a:p>
-            <a:pPr algn="l">
-              <a:lnSpc>
-                <a:spcPct val="100000"/>
-              </a:lnSpc>
-            </a:pPr>
-            <a:r>
-              <a:rPr sz="1000" b="0">
-                <a:solidFill>
-                  <a:srgbClr val="94A3B8"/>
-                </a:solidFill>
-                <a:latin typeface="PingFang SC"/>
-              </a:rPr>
-              <a:t>审计</a:t>
-            </a:r>
-          </a:p>
-        </p:txBody>
-      </p:sp>
-      <p:sp>
-        <p:nvSpPr>
-          <p:cNvPr id="50" name="Rounded Rectangle 49"/>
-          <p:cNvSpPr/>
-          <p:nvPr/>
-        </p:nvSpPr>
-        <p:spPr>
-          <a:xfrm>
-            <a:off x="1847850" y="4729161"/>
-            <a:ext cx="8877300" cy="1100137"/>
-          </a:xfrm>
-          <a:prstGeom prst="roundRect">
-            <a:avLst>
-              <a:gd name="adj" fmla="val 8000"/>
-            </a:avLst>
-          </a:prstGeom>
-          <a:solidFill>
-            <a:srgbClr val="F1F5F9"/>
-          </a:solidFill>
-          <a:ln>
-            <a:noFill/>
-          </a:ln>
-          <a:effectLst/>
-        </p:spPr>
-        <p:style>
-          <a:lnRef idx="1">
-            <a:schemeClr val="accent1"/>
-          </a:lnRef>
-          <a:fillRef idx="3">
-            <a:schemeClr val="accent1"/>
-          </a:fillRef>
-          <a:effectRef idx="2">
-            <a:schemeClr val="accent1"/>
-          </a:effectRef>
-          <a:fontRef idx="minor">
-            <a:schemeClr val="lt1"/>
-          </a:fontRef>
-        </p:style>
-        <p:txBody>
-          <a:bodyPr rtlCol="0" anchor="ctr"/>
-          <a:lstStyle/>
-          <a:p>
-            <a:pPr algn="ctr"/>
-          </a:p>
-        </p:txBody>
-      </p:sp>
-      <p:sp>
-        <p:nvSpPr>
-          <p:cNvPr id="51" name="Rounded Rectangle 50"/>
-          <p:cNvSpPr/>
-          <p:nvPr/>
-        </p:nvSpPr>
-        <p:spPr>
-          <a:xfrm>
-            <a:off x="1905000" y="4767261"/>
-            <a:ext cx="4305300" cy="1023937"/>
-          </a:xfrm>
-          <a:prstGeom prst="roundRect">
-            <a:avLst>
-              <a:gd name="adj" fmla="val 8000"/>
-            </a:avLst>
-          </a:prstGeom>
-          <a:solidFill>
-            <a:srgbClr val="FFFFFF"/>
-          </a:solidFill>
-          <a:ln w="12700">
-            <a:solidFill>
-              <a:srgbClr val="F59E0B"/>
-            </a:solidFill>
-          </a:ln>
-          <a:effectLst/>
-        </p:spPr>
-        <p:style>
-          <a:lnRef idx="1">
-            <a:schemeClr val="accent1"/>
-          </a:lnRef>
-          <a:fillRef idx="3">
-            <a:schemeClr val="accent1"/>
-          </a:fillRef>
-          <a:effectRef idx="2">
-            <a:schemeClr val="accent1"/>
-          </a:effectRef>
-          <a:fontRef idx="minor">
-            <a:schemeClr val="lt1"/>
-          </a:fontRef>
-        </p:style>
-        <p:txBody>
-          <a:bodyPr rtlCol="0" anchor="ctr"/>
-          <a:lstStyle/>
-          <a:p>
-            <a:pPr algn="ctr"/>
-          </a:p>
-        </p:txBody>
-      </p:sp>
-      <p:sp>
-        <p:nvSpPr>
-          <p:cNvPr id="52" name="Rectangle 51"/>
-          <p:cNvSpPr/>
-          <p:nvPr/>
-        </p:nvSpPr>
-        <p:spPr>
-          <a:xfrm>
-            <a:off x="1905000" y="4767261"/>
-            <a:ext cx="47625" cy="1023937"/>
-          </a:xfrm>
-          <a:prstGeom prst="rect">
-            <a:avLst/>
-          </a:prstGeom>
-          <a:solidFill>
-            <a:srgbClr val="F59E0B"/>
-          </a:solidFill>
-          <a:ln>
-            <a:noFill/>
-          </a:ln>
-          <a:effectLst/>
-        </p:spPr>
-        <p:style>
-          <a:lnRef idx="1">
-            <a:schemeClr val="accent1"/>
-          </a:lnRef>
-          <a:fillRef idx="3">
-            <a:schemeClr val="accent1"/>
-          </a:fillRef>
-          <a:effectRef idx="2">
-            <a:schemeClr val="accent1"/>
-          </a:effectRef>
-          <a:fontRef idx="minor">
-            <a:schemeClr val="lt1"/>
-          </a:fontRef>
-        </p:style>
-        <p:txBody>
-          <a:bodyPr rtlCol="0" anchor="ctr"/>
-          <a:lstStyle/>
-          <a:p>
-            <a:pPr algn="ctr"/>
-          </a:p>
-        </p:txBody>
-      </p:sp>
-      <p:sp>
-        <p:nvSpPr>
-          <p:cNvPr id="53" name="TextBox 52"/>
-          <p:cNvSpPr txBox="1"/>
-          <p:nvPr/>
-        </p:nvSpPr>
-        <p:spPr>
-          <a:xfrm>
-            <a:off x="2038350" y="4767261"/>
-            <a:ext cx="4076700" cy="1023937"/>
-          </a:xfrm>
-          <a:prstGeom prst="rect">
-            <a:avLst/>
-          </a:prstGeom>
-          <a:noFill/>
-        </p:spPr>
-        <p:txBody>
-          <a:bodyPr wrap="square" anchor="ctr">
-            <a:spAutoFit/>
-          </a:bodyPr>
-          <a:lstStyle/>
-          <a:p>
-            <a:pPr algn="l">
-              <a:lnSpc>
-                <a:spcPct val="100000"/>
-              </a:lnSpc>
-            </a:pPr>
-            <a:r>
-              <a:rPr sz="1200" b="1">
-                <a:solidFill>
-                  <a:srgbClr val="475569"/>
-                </a:solidFill>
-                <a:latin typeface="PingFang SC"/>
-              </a:rPr>
-              <a:t>外部:MCP Client</a:t>
-            </a:r>
-          </a:p>
-        </p:txBody>
-      </p:sp>
-      <p:sp>
-        <p:nvSpPr>
-          <p:cNvPr id="54" name="Rounded Rectangle 53"/>
-          <p:cNvSpPr/>
-          <p:nvPr/>
-        </p:nvSpPr>
-        <p:spPr>
-          <a:xfrm>
-            <a:off x="6362700" y="4767261"/>
-            <a:ext cx="4305300" cy="1023937"/>
-          </a:xfrm>
-          <a:prstGeom prst="roundRect">
-            <a:avLst>
-              <a:gd name="adj" fmla="val 8000"/>
-            </a:avLst>
-          </a:prstGeom>
-          <a:solidFill>
-            <a:srgbClr val="FFFFFF"/>
-          </a:solidFill>
-          <a:ln w="12700">
-            <a:solidFill>
-              <a:srgbClr val="F59E0B"/>
-            </a:solidFill>
-          </a:ln>
-          <a:effectLst/>
-        </p:spPr>
-        <p:style>
-          <a:lnRef idx="1">
-            <a:schemeClr val="accent1"/>
-          </a:lnRef>
-          <a:fillRef idx="3">
-            <a:schemeClr val="accent1"/>
-          </a:fillRef>
-          <a:effectRef idx="2">
-            <a:schemeClr val="accent1"/>
-          </a:effectRef>
-          <a:fontRef idx="minor">
-            <a:schemeClr val="lt1"/>
-          </a:fontRef>
-        </p:style>
-        <p:txBody>
-          <a:bodyPr rtlCol="0" anchor="ctr"/>
-          <a:lstStyle/>
-          <a:p>
-            <a:pPr algn="ctr"/>
-          </a:p>
-        </p:txBody>
-      </p:sp>
-      <p:sp>
-        <p:nvSpPr>
-          <p:cNvPr id="55" name="Rectangle 54"/>
-          <p:cNvSpPr/>
-          <p:nvPr/>
-        </p:nvSpPr>
-        <p:spPr>
-          <a:xfrm>
-            <a:off x="6362700" y="4767261"/>
-            <a:ext cx="47625" cy="1023937"/>
-          </a:xfrm>
-          <a:prstGeom prst="rect">
-            <a:avLst/>
-          </a:prstGeom>
-          <a:solidFill>
-            <a:srgbClr val="F59E0B"/>
-          </a:solidFill>
-          <a:ln>
-            <a:noFill/>
-          </a:ln>
-          <a:effectLst/>
-        </p:spPr>
-        <p:style>
-          <a:lnRef idx="1">
-            <a:schemeClr val="accent1"/>
-          </a:lnRef>
-          <a:fillRef idx="3">
-            <a:schemeClr val="accent1"/>
-          </a:fillRef>
-          <a:effectRef idx="2">
-            <a:schemeClr val="accent1"/>
-          </a:effectRef>
-          <a:fontRef idx="minor">
-            <a:schemeClr val="lt1"/>
-          </a:fontRef>
-        </p:style>
-        <p:txBody>
-          <a:bodyPr rtlCol="0" anchor="ctr"/>
-          <a:lstStyle/>
-          <a:p>
-            <a:pPr algn="ctr"/>
-          </a:p>
-        </p:txBody>
-      </p:sp>
-      <p:sp>
-        <p:nvSpPr>
-          <p:cNvPr id="56" name="TextBox 55"/>
-          <p:cNvSpPr txBox="1"/>
-          <p:nvPr/>
-        </p:nvSpPr>
-        <p:spPr>
-          <a:xfrm>
-            <a:off x="6496050" y="4767261"/>
-            <a:ext cx="4076700" cy="1023937"/>
-          </a:xfrm>
-          <a:prstGeom prst="rect">
-            <a:avLst/>
-          </a:prstGeom>
-          <a:noFill/>
-        </p:spPr>
-        <p:txBody>
-          <a:bodyPr wrap="square" anchor="ctr">
-            <a:spAutoFit/>
-          </a:bodyPr>
-          <a:lstStyle/>
-          <a:p>
-            <a:pPr algn="l">
-              <a:lnSpc>
-                <a:spcPct val="100000"/>
-              </a:lnSpc>
-            </a:pPr>
-            <a:r>
-              <a:rPr sz="1200" b="1">
-                <a:solidFill>
-                  <a:srgbClr val="475569"/>
+                  <a:srgbClr val="0B1D3A"/>
                 </a:solidFill>
                 <a:latin typeface="PingFang SC"/>
               </a:rPr>
@@ -29460,7 +29691,7 @@
       </p:sp>
       <p:sp>
         <p:nvSpPr>
-          <p:cNvPr id="57" name="TextBox 56"/>
+          <p:cNvPr id="64" name="TextBox 63"/>
           <p:cNvSpPr txBox="1"/>
           <p:nvPr/>
         </p:nvSpPr>
@@ -29499,7 +29730,7 @@
       </p:sp>
       <p:sp>
         <p:nvSpPr>
-          <p:cNvPr id="58" name="TextBox 57"/>
+          <p:cNvPr id="65" name="TextBox 64"/>
           <p:cNvSpPr txBox="1"/>
           <p:nvPr/>
         </p:nvSpPr>
@@ -32892,7 +33123,7 @@
                 </a:solidFill>
                 <a:latin typeface="PingFang SC"/>
               </a:rPr>
-              <a:t>5. role=tool 回灌|意图与执行分离</a:t>
+              <a:t>5. role=tool 回灌</a:t>
             </a:r>
           </a:p>
         </p:txBody>

--- a/03-课件PPT/讲次版/第2章-1-讲次 2-1 · Function Calling 与 .pptx
+++ b/03-课件PPT/讲次版/第2章-1-讲次 2-1 · Function Calling 与 .pptx
@@ -27342,7 +27342,7 @@
           <a:noFill/>
         </p:spPr>
         <p:txBody>
-          <a:bodyPr wrap="none" anchor="ctr">
+          <a:bodyPr wrap="square" anchor="ctr">
             <a:spAutoFit/>
           </a:bodyPr>
           <a:lstStyle/>
@@ -27353,7 +27353,7 @@
               </a:lnSpc>
             </a:pPr>
             <a:r>
-              <a:rPr sz="1100" b="1">
+              <a:rPr sz="1300" b="1">
                 <a:solidFill>
                   <a:srgbClr val="0B1D3A"/>
                 </a:solidFill>
@@ -27473,7 +27473,7 @@
           <a:noFill/>
         </p:spPr>
         <p:txBody>
-          <a:bodyPr wrap="none" anchor="ctr">
+          <a:bodyPr wrap="square" anchor="ctr">
             <a:spAutoFit/>
           </a:bodyPr>
           <a:lstStyle/>
@@ -27604,7 +27604,7 @@
           <a:noFill/>
         </p:spPr>
         <p:txBody>
-          <a:bodyPr wrap="none" anchor="ctr">
+          <a:bodyPr wrap="square" anchor="ctr">
             <a:spAutoFit/>
           </a:bodyPr>
           <a:lstStyle/>
@@ -27735,7 +27735,7 @@
           <a:noFill/>
         </p:spPr>
         <p:txBody>
-          <a:bodyPr wrap="none" anchor="ctr">
+          <a:bodyPr wrap="square" anchor="ctr">
             <a:spAutoFit/>
           </a:bodyPr>
           <a:lstStyle/>
@@ -28117,7 +28117,7 @@
           <a:noFill/>
         </p:spPr>
         <p:txBody>
-          <a:bodyPr wrap="none" anchor="ctr">
+          <a:bodyPr wrap="square" anchor="ctr">
             <a:spAutoFit/>
           </a:bodyPr>
           <a:lstStyle/>
@@ -28248,7 +28248,7 @@
           <a:noFill/>
         </p:spPr>
         <p:txBody>
-          <a:bodyPr wrap="none" anchor="ctr">
+          <a:bodyPr wrap="square" anchor="ctr">
             <a:spAutoFit/>
           </a:bodyPr>
           <a:lstStyle/>
@@ -28379,7 +28379,7 @@
           <a:noFill/>
         </p:spPr>
         <p:txBody>
-          <a:bodyPr wrap="none" anchor="ctr">
+          <a:bodyPr wrap="square" anchor="ctr">
             <a:spAutoFit/>
           </a:bodyPr>
           <a:lstStyle/>
@@ -28510,7 +28510,7 @@
           <a:noFill/>
         </p:spPr>
         <p:txBody>
-          <a:bodyPr wrap="none" anchor="ctr">
+          <a:bodyPr wrap="square" anchor="ctr">
             <a:spAutoFit/>
           </a:bodyPr>
           <a:lstStyle/>
@@ -28892,7 +28892,7 @@
           <a:noFill/>
         </p:spPr>
         <p:txBody>
-          <a:bodyPr wrap="none" anchor="ctr">
+          <a:bodyPr wrap="square" anchor="ctr">
             <a:spAutoFit/>
           </a:bodyPr>
           <a:lstStyle/>
@@ -29023,7 +29023,7 @@
           <a:noFill/>
         </p:spPr>
         <p:txBody>
-          <a:bodyPr wrap="none" anchor="ctr">
+          <a:bodyPr wrap="square" anchor="ctr">
             <a:spAutoFit/>
           </a:bodyPr>
           <a:lstStyle/>
@@ -29034,7 +29034,7 @@
               </a:lnSpc>
             </a:pPr>
             <a:r>
-              <a:rPr sz="1100" b="1">
+              <a:rPr sz="1300" b="1">
                 <a:solidFill>
                   <a:srgbClr val="0B1D3A"/>
                 </a:solidFill>
@@ -29154,7 +29154,7 @@
           <a:noFill/>
         </p:spPr>
         <p:txBody>
-          <a:bodyPr wrap="none" anchor="ctr">
+          <a:bodyPr wrap="square" anchor="ctr">
             <a:spAutoFit/>
           </a:bodyPr>
           <a:lstStyle/>
@@ -29536,7 +29536,7 @@
           <a:noFill/>
         </p:spPr>
         <p:txBody>
-          <a:bodyPr wrap="none" anchor="ctr">
+          <a:bodyPr wrap="square" anchor="ctr">
             <a:spAutoFit/>
           </a:bodyPr>
           <a:lstStyle/>
@@ -29547,7 +29547,7 @@
               </a:lnSpc>
             </a:pPr>
             <a:r>
-              <a:rPr sz="1100" b="1">
+              <a:rPr sz="1300" b="1">
                 <a:solidFill>
                   <a:srgbClr val="0B1D3A"/>
                 </a:solidFill>
@@ -29667,7 +29667,7 @@
           <a:noFill/>
         </p:spPr>
         <p:txBody>
-          <a:bodyPr wrap="none" anchor="ctr">
+          <a:bodyPr wrap="square" anchor="ctr">
             <a:spAutoFit/>
           </a:bodyPr>
           <a:lstStyle/>
